--- a/output_pptx/Because_He_Lives.pptx
+++ b/output_pptx/Because_He_Lives.pptx
@@ -3118,23 +3118,23 @@
         </p:nvSpPr>
         <p:spPr>
           <a:xfrm>
-            <a:off x="594360" y="2258568"/>
-            <a:ext cx="11002975" cy="685800"/>
-          </a:xfrm>
-          <a:prstGeom prst="rect">
-            <a:avLst/>
-          </a:prstGeom>
-          <a:noFill/>
-        </p:spPr>
-        <p:txBody>
-          <a:bodyPr wrap="square">
-            <a:spAutoFit/>
-          </a:bodyPr>
-          <a:lstStyle/>
-          <a:p>
-            <a:pPr algn="ctr"/>
-            <a:r>
-              <a:rPr sz="4400" b="1" i="0">
+            <a:off x="640080" y="2052828"/>
+            <a:ext cx="10911535" cy="731520"/>
+          </a:xfrm>
+          <a:prstGeom prst="rect">
+            <a:avLst/>
+          </a:prstGeom>
+          <a:noFill/>
+        </p:spPr>
+        <p:txBody>
+          <a:bodyPr wrap="square">
+            <a:spAutoFit/>
+          </a:bodyPr>
+          <a:lstStyle/>
+          <a:p>
+            <a:pPr algn="ctr"/>
+            <a:r>
+              <a:rPr sz="4800" b="1" i="0">
                 <a:solidFill>
                   <a:srgbClr val="FFFFFF"/>
                 </a:solidFill>
@@ -3153,29 +3153,29 @@
         </p:nvSpPr>
         <p:spPr>
           <a:xfrm>
-            <a:off x="594360" y="2980944"/>
-            <a:ext cx="11002975" cy="347472"/>
-          </a:xfrm>
-          <a:prstGeom prst="rect">
-            <a:avLst/>
-          </a:prstGeom>
-          <a:noFill/>
-        </p:spPr>
-        <p:txBody>
-          <a:bodyPr wrap="square">
-            <a:spAutoFit/>
-          </a:bodyPr>
-          <a:lstStyle/>
-          <a:p>
-            <a:pPr algn="ctr"/>
-            <a:r>
-              <a:rPr sz="2200" b="0" i="1">
-                <a:solidFill>
-                  <a:srgbClr val="8C8C8C"/>
-                </a:solidFill>
-                <a:latin typeface="Arial"/>
-              </a:rPr>
-              <a:t/>
+            <a:off x="640080" y="2985516"/>
+            <a:ext cx="10911535" cy="731520"/>
+          </a:xfrm>
+          <a:prstGeom prst="rect">
+            <a:avLst/>
+          </a:prstGeom>
+          <a:noFill/>
+        </p:spPr>
+        <p:txBody>
+          <a:bodyPr wrap="square">
+            <a:spAutoFit/>
+          </a:bodyPr>
+          <a:lstStyle/>
+          <a:p>
+            <a:pPr algn="ctr"/>
+            <a:r>
+              <a:rPr sz="3400" b="1" i="0">
+                <a:solidFill>
+                  <a:srgbClr val="FFFFFF"/>
+                </a:solidFill>
+                <a:latin typeface="Arial"/>
+              </a:rPr>
+              <a:t>Deus enviou Seu Filho. Eles o chamaram Jesus.</a:t>
             </a:r>
           </a:p>
         </p:txBody>
@@ -3188,29 +3188,29 @@
         </p:nvSpPr>
         <p:spPr>
           <a:xfrm>
-            <a:off x="594360" y="3529584"/>
-            <a:ext cx="11002975" cy="685800"/>
-          </a:xfrm>
-          <a:prstGeom prst="rect">
-            <a:avLst/>
-          </a:prstGeom>
-          <a:noFill/>
-        </p:spPr>
-        <p:txBody>
-          <a:bodyPr wrap="square">
-            <a:spAutoFit/>
-          </a:bodyPr>
-          <a:lstStyle/>
-          <a:p>
-            <a:pPr algn="ctr"/>
-            <a:r>
-              <a:rPr sz="3128" b="1" i="0">
-                <a:solidFill>
-                  <a:srgbClr val="FFFFFF"/>
-                </a:solidFill>
-                <a:latin typeface="Arial"/>
-              </a:rPr>
-              <a:t>Deus enviou Seu Filho. Eles o chamaram Jesus.</a:t>
+            <a:off x="640080" y="4128516"/>
+            <a:ext cx="10911535" cy="310896"/>
+          </a:xfrm>
+          <a:prstGeom prst="rect">
+            <a:avLst/>
+          </a:prstGeom>
+          <a:noFill/>
+        </p:spPr>
+        <p:txBody>
+          <a:bodyPr wrap="square">
+            <a:spAutoFit/>
+          </a:bodyPr>
+          <a:lstStyle/>
+          <a:p>
+            <a:pPr algn="ctr"/>
+            <a:r>
+              <a:rPr sz="2000" b="0" i="0">
+                <a:solidFill>
+                  <a:srgbClr val="828282"/>
+                </a:solidFill>
+                <a:latin typeface="Arial"/>
+              </a:rPr>
+              <a:t>わたしを ゆるすために</a:t>
             </a:r>
           </a:p>
         </p:txBody>
@@ -3223,29 +3223,29 @@
         </p:nvSpPr>
         <p:spPr>
           <a:xfrm>
-            <a:off x="594360" y="4251960"/>
-            <a:ext cx="11002975" cy="347472"/>
-          </a:xfrm>
-          <a:prstGeom prst="rect">
-            <a:avLst/>
-          </a:prstGeom>
-          <a:noFill/>
-        </p:spPr>
-        <p:txBody>
-          <a:bodyPr wrap="square">
-            <a:spAutoFit/>
-          </a:bodyPr>
-          <a:lstStyle/>
-          <a:p>
-            <a:pPr algn="ctr"/>
-            <a:r>
-              <a:rPr sz="2200" b="0" i="1">
-                <a:solidFill>
-                  <a:srgbClr val="8C8C8C"/>
-                </a:solidFill>
-                <a:latin typeface="Arial"/>
-              </a:rPr>
-              <a:t/>
+            <a:off x="640080" y="4494276"/>
+            <a:ext cx="10911535" cy="310896"/>
+          </a:xfrm>
+          <a:prstGeom prst="rect">
+            <a:avLst/>
+          </a:prstGeom>
+          <a:noFill/>
+        </p:spPr>
+        <p:txBody>
+          <a:bodyPr wrap="square">
+            <a:spAutoFit/>
+          </a:bodyPr>
+          <a:lstStyle/>
+          <a:p>
+            <a:pPr algn="ctr"/>
+            <a:r>
+              <a:rPr sz="2000" b="0" i="0">
+                <a:solidFill>
+                  <a:srgbClr val="828282"/>
+                </a:solidFill>
+                <a:latin typeface="Arial"/>
+              </a:rPr>
+              <a:t>主イエスは来られて</a:t>
             </a:r>
           </a:p>
         </p:txBody>
@@ -3284,23 +3284,23 @@
         </p:nvSpPr>
         <p:spPr>
           <a:xfrm>
-            <a:off x="594360" y="1837944"/>
-            <a:ext cx="11002975" cy="685800"/>
-          </a:xfrm>
-          <a:prstGeom prst="rect">
-            <a:avLst/>
-          </a:prstGeom>
-          <a:noFill/>
-        </p:spPr>
-        <p:txBody>
-          <a:bodyPr wrap="square">
-            <a:spAutoFit/>
-          </a:bodyPr>
-          <a:lstStyle/>
-          <a:p>
-            <a:pPr algn="ctr"/>
-            <a:r>
-              <a:rPr sz="4400" b="1" i="0">
+            <a:off x="640080" y="1650492"/>
+            <a:ext cx="10911535" cy="731520"/>
+          </a:xfrm>
+          <a:prstGeom prst="rect">
+            <a:avLst/>
+          </a:prstGeom>
+          <a:noFill/>
+        </p:spPr>
+        <p:txBody>
+          <a:bodyPr wrap="square">
+            <a:spAutoFit/>
+          </a:bodyPr>
+          <a:lstStyle/>
+          <a:p>
+            <a:pPr algn="ctr"/>
+            <a:r>
+              <a:rPr sz="4800" b="1" i="0">
                 <a:solidFill>
                   <a:srgbClr val="FFFFFF"/>
                 </a:solidFill>
@@ -3319,8 +3319,8 @@
         </p:nvSpPr>
         <p:spPr>
           <a:xfrm>
-            <a:off x="594360" y="2560320"/>
-            <a:ext cx="11002975" cy="384048"/>
+            <a:off x="640080" y="2418588"/>
+            <a:ext cx="10911535" cy="365760"/>
           </a:xfrm>
           <a:prstGeom prst="rect">
             <a:avLst/>
@@ -3337,7 +3337,7 @@
             <a:r>
               <a:rPr sz="2400" b="0" i="1">
                 <a:solidFill>
-                  <a:srgbClr val="B4B4B4"/>
+                  <a:srgbClr val="AAAAAA"/>
                 </a:solidFill>
                 <a:latin typeface="Arial"/>
               </a:rPr>
@@ -3354,8 +3354,78 @@
         </p:nvSpPr>
         <p:spPr>
           <a:xfrm>
-            <a:off x="594360" y="2980944"/>
-            <a:ext cx="11002975" cy="347472"/>
+            <a:off x="640080" y="2985516"/>
+            <a:ext cx="10911535" cy="731520"/>
+          </a:xfrm>
+          <a:prstGeom prst="rect">
+            <a:avLst/>
+          </a:prstGeom>
+          <a:noFill/>
+        </p:spPr>
+        <p:txBody>
+          <a:bodyPr wrap="square">
+            <a:spAutoFit/>
+          </a:bodyPr>
+          <a:lstStyle/>
+          <a:p>
+            <a:pPr algn="ctr"/>
+            <a:r>
+              <a:rPr sz="4800" b="1" i="0">
+                <a:solidFill>
+                  <a:srgbClr val="FFFFFF"/>
+                </a:solidFill>
+                <a:latin typeface="Arial"/>
+              </a:rPr>
+              <a:t>えいこうの主は おさめられ</a:t>
+            </a:r>
+          </a:p>
+        </p:txBody>
+      </p:sp>
+      <p:sp>
+        <p:nvSpPr>
+          <p:cNvPr id="5" name="TextBox 4"/>
+          <p:cNvSpPr txBox="1"/>
+          <p:nvPr/>
+        </p:nvSpPr>
+        <p:spPr>
+          <a:xfrm>
+            <a:off x="640080" y="3753612"/>
+            <a:ext cx="10911535" cy="365760"/>
+          </a:xfrm>
+          <a:prstGeom prst="rect">
+            <a:avLst/>
+          </a:prstGeom>
+          <a:noFill/>
+        </p:spPr>
+        <p:txBody>
+          <a:bodyPr wrap="square">
+            <a:spAutoFit/>
+          </a:bodyPr>
+          <a:lstStyle/>
+          <a:p>
+            <a:pPr algn="ctr"/>
+            <a:r>
+              <a:rPr sz="2400" b="0" i="1">
+                <a:solidFill>
+                  <a:srgbClr val="AAAAAA"/>
+                </a:solidFill>
+                <a:latin typeface="Arial"/>
+              </a:rPr>
+              <a:t>eikou no shu wa osamerare</a:t>
+            </a:r>
+          </a:p>
+        </p:txBody>
+      </p:sp>
+      <p:sp>
+        <p:nvSpPr>
+          <p:cNvPr id="6" name="TextBox 5"/>
+          <p:cNvSpPr txBox="1"/>
+          <p:nvPr/>
+        </p:nvSpPr>
+        <p:spPr>
+          <a:xfrm>
+            <a:off x="640080" y="4530852"/>
+            <a:ext cx="10911535" cy="310896"/>
           </a:xfrm>
           <a:prstGeom prst="rect">
             <a:avLst/>
@@ -3372,81 +3442,11 @@
             <a:r>
               <a:rPr sz="2000" b="0" i="1">
                 <a:solidFill>
-                  <a:srgbClr val="8C8C8C"/>
-                </a:solidFill>
-                <a:latin typeface="Arial"/>
-              </a:rPr>
-              <a:t/>
-            </a:r>
-          </a:p>
-        </p:txBody>
-      </p:sp>
-      <p:sp>
-        <p:nvSpPr>
-          <p:cNvPr id="5" name="TextBox 4"/>
-          <p:cNvSpPr txBox="1"/>
-          <p:nvPr/>
-        </p:nvSpPr>
-        <p:spPr>
-          <a:xfrm>
-            <a:off x="594360" y="3529584"/>
-            <a:ext cx="11002975" cy="685800"/>
-          </a:xfrm>
-          <a:prstGeom prst="rect">
-            <a:avLst/>
-          </a:prstGeom>
-          <a:noFill/>
-        </p:spPr>
-        <p:txBody>
-          <a:bodyPr wrap="square">
-            <a:spAutoFit/>
-          </a:bodyPr>
-          <a:lstStyle/>
-          <a:p>
-            <a:pPr algn="ctr"/>
-            <a:r>
-              <a:rPr sz="4400" b="1" i="0">
-                <a:solidFill>
-                  <a:srgbClr val="FFFFFF"/>
-                </a:solidFill>
-                <a:latin typeface="Arial"/>
-              </a:rPr>
-              <a:t>えいこうの主は おさめられ</a:t>
-            </a:r>
-          </a:p>
-        </p:txBody>
-      </p:sp>
-      <p:sp>
-        <p:nvSpPr>
-          <p:cNvPr id="6" name="TextBox 5"/>
-          <p:cNvSpPr txBox="1"/>
-          <p:nvPr/>
-        </p:nvSpPr>
-        <p:spPr>
-          <a:xfrm>
-            <a:off x="594360" y="4251960"/>
-            <a:ext cx="11002975" cy="384048"/>
-          </a:xfrm>
-          <a:prstGeom prst="rect">
-            <a:avLst/>
-          </a:prstGeom>
-          <a:noFill/>
-        </p:spPr>
-        <p:txBody>
-          <a:bodyPr wrap="square">
-            <a:spAutoFit/>
-          </a:bodyPr>
-          <a:lstStyle/>
-          <a:p>
-            <a:pPr algn="ctr"/>
-            <a:r>
-              <a:rPr sz="2400" b="0" i="1">
-                <a:solidFill>
-                  <a:srgbClr val="B4B4B4"/>
-                </a:solidFill>
-                <a:latin typeface="Arial"/>
-              </a:rPr>
-              <a:t>eikou no shu wa osamerare</a:t>
+                  <a:srgbClr val="828282"/>
+                </a:solidFill>
+                <a:latin typeface="Arial"/>
+              </a:rPr>
+              <a:t>Ele veio para amar, curar e perdoar;</a:t>
             </a:r>
           </a:p>
         </p:txBody>
@@ -3459,8 +3459,8 @@
         </p:nvSpPr>
         <p:spPr>
           <a:xfrm>
-            <a:off x="594360" y="4672584"/>
-            <a:ext cx="11002975" cy="347472"/>
+            <a:off x="640080" y="4896612"/>
+            <a:ext cx="10911535" cy="310896"/>
           </a:xfrm>
           <a:prstGeom prst="rect">
             <a:avLst/>
@@ -3477,11 +3477,11 @@
             <a:r>
               <a:rPr sz="2000" b="0" i="1">
                 <a:solidFill>
-                  <a:srgbClr val="8C8C8C"/>
-                </a:solidFill>
-                <a:latin typeface="Arial"/>
-              </a:rPr>
-              <a:t/>
+                  <a:srgbClr val="828282"/>
+                </a:solidFill>
+                <a:latin typeface="Arial"/>
+              </a:rPr>
+              <a:t>Viveu e morreu para comprar-me perdão.</a:t>
             </a:r>
           </a:p>
         </p:txBody>
@@ -3520,23 +3520,23 @@
         </p:nvSpPr>
         <p:spPr>
           <a:xfrm>
-            <a:off x="594360" y="1837944"/>
-            <a:ext cx="11002975" cy="685800"/>
-          </a:xfrm>
-          <a:prstGeom prst="rect">
-            <a:avLst/>
-          </a:prstGeom>
-          <a:noFill/>
-        </p:spPr>
-        <p:txBody>
-          <a:bodyPr wrap="square">
-            <a:spAutoFit/>
-          </a:bodyPr>
-          <a:lstStyle/>
-          <a:p>
-            <a:pPr algn="ctr"/>
-            <a:r>
-              <a:rPr sz="4400" b="1" i="0">
+            <a:off x="640080" y="1650492"/>
+            <a:ext cx="10911535" cy="731520"/>
+          </a:xfrm>
+          <a:prstGeom prst="rect">
+            <a:avLst/>
+          </a:prstGeom>
+          <a:noFill/>
+        </p:spPr>
+        <p:txBody>
+          <a:bodyPr wrap="square">
+            <a:spAutoFit/>
+          </a:bodyPr>
+          <a:lstStyle/>
+          <a:p>
+            <a:pPr algn="ctr"/>
+            <a:r>
+              <a:rPr sz="4800" b="1" i="0">
                 <a:solidFill>
                   <a:srgbClr val="FFFFFF"/>
                 </a:solidFill>
@@ -3555,8 +3555,8 @@
         </p:nvSpPr>
         <p:spPr>
           <a:xfrm>
-            <a:off x="594360" y="2560320"/>
-            <a:ext cx="11002975" cy="384048"/>
+            <a:off x="640080" y="2418588"/>
+            <a:ext cx="10911535" cy="365760"/>
           </a:xfrm>
           <a:prstGeom prst="rect">
             <a:avLst/>
@@ -3573,7 +3573,7 @@
             <a:r>
               <a:rPr sz="2400" b="0" i="1">
                 <a:solidFill>
-                  <a:srgbClr val="B4B4B4"/>
+                  <a:srgbClr val="AAAAAA"/>
                 </a:solidFill>
                 <a:latin typeface="Arial"/>
               </a:rPr>
@@ -3590,8 +3590,78 @@
         </p:nvSpPr>
         <p:spPr>
           <a:xfrm>
-            <a:off x="594360" y="2980944"/>
-            <a:ext cx="11002975" cy="347472"/>
+            <a:off x="640080" y="2985516"/>
+            <a:ext cx="10911535" cy="731520"/>
+          </a:xfrm>
+          <a:prstGeom prst="rect">
+            <a:avLst/>
+          </a:prstGeom>
+          <a:noFill/>
+        </p:spPr>
+        <p:txBody>
+          <a:bodyPr wrap="square">
+            <a:spAutoFit/>
+          </a:bodyPr>
+          <a:lstStyle/>
+          <a:p>
+            <a:pPr algn="ctr"/>
+            <a:r>
+              <a:rPr sz="4800" b="1" i="0">
+                <a:solidFill>
+                  <a:srgbClr val="FFFFFF"/>
+                </a:solidFill>
+                <a:latin typeface="Arial"/>
+              </a:rPr>
+              <a:t>主イエスが おられる</a:t>
+            </a:r>
+          </a:p>
+        </p:txBody>
+      </p:sp>
+      <p:sp>
+        <p:nvSpPr>
+          <p:cNvPr id="5" name="TextBox 4"/>
+          <p:cNvSpPr txBox="1"/>
+          <p:nvPr/>
+        </p:nvSpPr>
+        <p:spPr>
+          <a:xfrm>
+            <a:off x="640080" y="3753612"/>
+            <a:ext cx="10911535" cy="365760"/>
+          </a:xfrm>
+          <a:prstGeom prst="rect">
+            <a:avLst/>
+          </a:prstGeom>
+          <a:noFill/>
+        </p:spPr>
+        <p:txBody>
+          <a:bodyPr wrap="square">
+            <a:spAutoFit/>
+          </a:bodyPr>
+          <a:lstStyle/>
+          <a:p>
+            <a:pPr algn="ctr"/>
+            <a:r>
+              <a:rPr sz="2400" b="0" i="1">
+                <a:solidFill>
+                  <a:srgbClr val="AAAAAA"/>
+                </a:solidFill>
+                <a:latin typeface="Arial"/>
+              </a:rPr>
+              <a:t>shu iesu ga orareru</a:t>
+            </a:r>
+          </a:p>
+        </p:txBody>
+      </p:sp>
+      <p:sp>
+        <p:nvSpPr>
+          <p:cNvPr id="6" name="TextBox 5"/>
+          <p:cNvSpPr txBox="1"/>
+          <p:nvPr/>
+        </p:nvSpPr>
+        <p:spPr>
+          <a:xfrm>
+            <a:off x="640080" y="4530852"/>
+            <a:ext cx="10911535" cy="310896"/>
           </a:xfrm>
           <a:prstGeom prst="rect">
             <a:avLst/>
@@ -3608,81 +3678,11 @@
             <a:r>
               <a:rPr sz="2000" b="0" i="1">
                 <a:solidFill>
-                  <a:srgbClr val="8C8C8C"/>
-                </a:solidFill>
-                <a:latin typeface="Arial"/>
-              </a:rPr>
-              <a:t/>
-            </a:r>
-          </a:p>
-        </p:txBody>
-      </p:sp>
-      <p:sp>
-        <p:nvSpPr>
-          <p:cNvPr id="5" name="TextBox 4"/>
-          <p:cNvSpPr txBox="1"/>
-          <p:nvPr/>
-        </p:nvSpPr>
-        <p:spPr>
-          <a:xfrm>
-            <a:off x="594360" y="3529584"/>
-            <a:ext cx="11002975" cy="685800"/>
-          </a:xfrm>
-          <a:prstGeom prst="rect">
-            <a:avLst/>
-          </a:prstGeom>
-          <a:noFill/>
-        </p:spPr>
-        <p:txBody>
-          <a:bodyPr wrap="square">
-            <a:spAutoFit/>
-          </a:bodyPr>
-          <a:lstStyle/>
-          <a:p>
-            <a:pPr algn="ctr"/>
-            <a:r>
-              <a:rPr sz="4400" b="1" i="0">
-                <a:solidFill>
-                  <a:srgbClr val="FFFFFF"/>
-                </a:solidFill>
-                <a:latin typeface="Arial"/>
-              </a:rPr>
-              <a:t>主イエスが おられる</a:t>
-            </a:r>
-          </a:p>
-        </p:txBody>
-      </p:sp>
-      <p:sp>
-        <p:nvSpPr>
-          <p:cNvPr id="6" name="TextBox 5"/>
-          <p:cNvSpPr txBox="1"/>
-          <p:nvPr/>
-        </p:nvSpPr>
-        <p:spPr>
-          <a:xfrm>
-            <a:off x="594360" y="4251960"/>
-            <a:ext cx="11002975" cy="384048"/>
-          </a:xfrm>
-          <a:prstGeom prst="rect">
-            <a:avLst/>
-          </a:prstGeom>
-          <a:noFill/>
-        </p:spPr>
-        <p:txBody>
-          <a:bodyPr wrap="square">
-            <a:spAutoFit/>
-          </a:bodyPr>
-          <a:lstStyle/>
-          <a:p>
-            <a:pPr algn="ctr"/>
-            <a:r>
-              <a:rPr sz="2400" b="0" i="1">
-                <a:solidFill>
-                  <a:srgbClr val="B4B4B4"/>
-                </a:solidFill>
-                <a:latin typeface="Arial"/>
-              </a:rPr>
-              <a:t>shu iesu ga orareru</a:t>
+                  <a:srgbClr val="828282"/>
+                </a:solidFill>
+                <a:latin typeface="Arial"/>
+              </a:rPr>
+              <a:t>Porque eu sei, Ele garante o futuro</a:t>
             </a:r>
           </a:p>
         </p:txBody>
@@ -3695,8 +3695,8 @@
         </p:nvSpPr>
         <p:spPr>
           <a:xfrm>
-            <a:off x="594360" y="4672584"/>
-            <a:ext cx="11002975" cy="347472"/>
+            <a:off x="640080" y="4896612"/>
+            <a:ext cx="10911535" cy="310896"/>
           </a:xfrm>
           <a:prstGeom prst="rect">
             <a:avLst/>
@@ -3713,11 +3713,11 @@
             <a:r>
               <a:rPr sz="2000" b="0" i="1">
                 <a:solidFill>
-                  <a:srgbClr val="8C8C8C"/>
-                </a:solidFill>
-                <a:latin typeface="Arial"/>
-              </a:rPr>
-              <a:t/>
+                  <a:srgbClr val="828282"/>
+                </a:solidFill>
+                <a:latin typeface="Arial"/>
+              </a:rPr>
+              <a:t>E a vida vale a pena viver,</a:t>
             </a:r>
           </a:p>
         </p:txBody>
@@ -3756,23 +3756,23 @@
         </p:nvSpPr>
         <p:spPr>
           <a:xfrm>
-            <a:off x="594360" y="1837944"/>
-            <a:ext cx="11002975" cy="685800"/>
-          </a:xfrm>
-          <a:prstGeom prst="rect">
-            <a:avLst/>
-          </a:prstGeom>
-          <a:noFill/>
-        </p:spPr>
-        <p:txBody>
-          <a:bodyPr wrap="square">
-            <a:spAutoFit/>
-          </a:bodyPr>
-          <a:lstStyle/>
-          <a:p>
-            <a:pPr algn="ctr"/>
-            <a:r>
-              <a:rPr sz="4400" b="1" i="0">
+            <a:off x="640080" y="1650492"/>
+            <a:ext cx="10911535" cy="731520"/>
+          </a:xfrm>
+          <a:prstGeom prst="rect">
+            <a:avLst/>
+          </a:prstGeom>
+          <a:noFill/>
+        </p:spPr>
+        <p:txBody>
+          <a:bodyPr wrap="square">
+            <a:spAutoFit/>
+          </a:bodyPr>
+          <a:lstStyle/>
+          <a:p>
+            <a:pPr algn="ctr"/>
+            <a:r>
+              <a:rPr sz="4800" b="1" i="0">
                 <a:solidFill>
                   <a:srgbClr val="FFFFFF"/>
                 </a:solidFill>
@@ -3791,8 +3791,8 @@
         </p:nvSpPr>
         <p:spPr>
           <a:xfrm>
-            <a:off x="594360" y="2560320"/>
-            <a:ext cx="11002975" cy="384048"/>
+            <a:off x="640080" y="2418588"/>
+            <a:ext cx="10911535" cy="365760"/>
           </a:xfrm>
           <a:prstGeom prst="rect">
             <a:avLst/>
@@ -3809,7 +3809,7 @@
             <a:r>
               <a:rPr sz="2400" b="0" i="1">
                 <a:solidFill>
-                  <a:srgbClr val="B4B4B4"/>
+                  <a:srgbClr val="AAAAAA"/>
                 </a:solidFill>
                 <a:latin typeface="Arial"/>
               </a:rPr>
@@ -3826,8 +3826,78 @@
         </p:nvSpPr>
         <p:spPr>
           <a:xfrm>
-            <a:off x="594360" y="2980944"/>
-            <a:ext cx="11002975" cy="347472"/>
+            <a:off x="640080" y="2985516"/>
+            <a:ext cx="10911535" cy="731520"/>
+          </a:xfrm>
+          <a:prstGeom prst="rect">
+            <a:avLst/>
+          </a:prstGeom>
+          <a:noFill/>
+        </p:spPr>
+        <p:txBody>
+          <a:bodyPr wrap="square">
+            <a:spAutoFit/>
+          </a:bodyPr>
+          <a:lstStyle/>
+          <a:p>
+            <a:pPr algn="ctr"/>
+            <a:r>
+              <a:rPr sz="4800" b="1" i="0">
+                <a:solidFill>
+                  <a:srgbClr val="FFFFFF"/>
+                </a:solidFill>
+                <a:latin typeface="Arial"/>
+              </a:rPr>
+              <a:t>あしたを生きるいみがある</a:t>
+            </a:r>
+          </a:p>
+        </p:txBody>
+      </p:sp>
+      <p:sp>
+        <p:nvSpPr>
+          <p:cNvPr id="5" name="TextBox 4"/>
+          <p:cNvSpPr txBox="1"/>
+          <p:nvPr/>
+        </p:nvSpPr>
+        <p:spPr>
+          <a:xfrm>
+            <a:off x="640080" y="3753612"/>
+            <a:ext cx="10911535" cy="365760"/>
+          </a:xfrm>
+          <a:prstGeom prst="rect">
+            <a:avLst/>
+          </a:prstGeom>
+          <a:noFill/>
+        </p:spPr>
+        <p:txBody>
+          <a:bodyPr wrap="square">
+            <a:spAutoFit/>
+          </a:bodyPr>
+          <a:lstStyle/>
+          <a:p>
+            <a:pPr algn="ctr"/>
+            <a:r>
+              <a:rPr sz="2400" b="0" i="1">
+                <a:solidFill>
+                  <a:srgbClr val="AAAAAA"/>
+                </a:solidFill>
+                <a:latin typeface="Arial"/>
+              </a:rPr>
+              <a:t>ashita wo ikiru imi ga aru</a:t>
+            </a:r>
+          </a:p>
+        </p:txBody>
+      </p:sp>
+      <p:sp>
+        <p:nvSpPr>
+          <p:cNvPr id="6" name="TextBox 5"/>
+          <p:cNvSpPr txBox="1"/>
+          <p:nvPr/>
+        </p:nvSpPr>
+        <p:spPr>
+          <a:xfrm>
+            <a:off x="640080" y="4530852"/>
+            <a:ext cx="10911535" cy="310896"/>
           </a:xfrm>
           <a:prstGeom prst="rect">
             <a:avLst/>
@@ -3844,81 +3914,11 @@
             <a:r>
               <a:rPr sz="2000" b="0" i="1">
                 <a:solidFill>
-                  <a:srgbClr val="8C8C8C"/>
-                </a:solidFill>
-                <a:latin typeface="Arial"/>
-              </a:rPr>
-              <a:t/>
-            </a:r>
-          </a:p>
-        </p:txBody>
-      </p:sp>
-      <p:sp>
-        <p:nvSpPr>
-          <p:cNvPr id="5" name="TextBox 4"/>
-          <p:cNvSpPr txBox="1"/>
-          <p:nvPr/>
-        </p:nvSpPr>
-        <p:spPr>
-          <a:xfrm>
-            <a:off x="594360" y="3529584"/>
-            <a:ext cx="11002975" cy="685800"/>
-          </a:xfrm>
-          <a:prstGeom prst="rect">
-            <a:avLst/>
-          </a:prstGeom>
-          <a:noFill/>
-        </p:spPr>
-        <p:txBody>
-          <a:bodyPr wrap="square">
-            <a:spAutoFit/>
-          </a:bodyPr>
-          <a:lstStyle/>
-          <a:p>
-            <a:pPr algn="ctr"/>
-            <a:r>
-              <a:rPr sz="4400" b="1" i="0">
-                <a:solidFill>
-                  <a:srgbClr val="FFFFFF"/>
-                </a:solidFill>
-                <a:latin typeface="Arial"/>
-              </a:rPr>
-              <a:t>あしたを生きるいみがある</a:t>
-            </a:r>
-          </a:p>
-        </p:txBody>
-      </p:sp>
-      <p:sp>
-        <p:nvSpPr>
-          <p:cNvPr id="6" name="TextBox 5"/>
-          <p:cNvSpPr txBox="1"/>
-          <p:nvPr/>
-        </p:nvSpPr>
-        <p:spPr>
-          <a:xfrm>
-            <a:off x="594360" y="4251960"/>
-            <a:ext cx="11002975" cy="384048"/>
-          </a:xfrm>
-          <a:prstGeom prst="rect">
-            <a:avLst/>
-          </a:prstGeom>
-          <a:noFill/>
-        </p:spPr>
-        <p:txBody>
-          <a:bodyPr wrap="square">
-            <a:spAutoFit/>
-          </a:bodyPr>
-          <a:lstStyle/>
-          <a:p>
-            <a:pPr algn="ctr"/>
-            <a:r>
-              <a:rPr sz="2400" b="0" i="1">
-                <a:solidFill>
-                  <a:srgbClr val="B4B4B4"/>
-                </a:solidFill>
-                <a:latin typeface="Arial"/>
-              </a:rPr>
-              <a:t>ashita wo ikiru imi ga aru</a:t>
+                  <a:srgbClr val="828282"/>
+                </a:solidFill>
+                <a:latin typeface="Arial"/>
+              </a:rPr>
+              <a:t>Apenas porque Ele vive.</a:t>
             </a:r>
           </a:p>
         </p:txBody>
@@ -3931,8 +3931,8 @@
         </p:nvSpPr>
         <p:spPr>
           <a:xfrm>
-            <a:off x="594360" y="4672584"/>
-            <a:ext cx="11002975" cy="347472"/>
+            <a:off x="640080" y="4896612"/>
+            <a:ext cx="10911535" cy="310896"/>
           </a:xfrm>
           <a:prstGeom prst="rect">
             <a:avLst/>
@@ -3949,11 +3949,11 @@
             <a:r>
               <a:rPr sz="2000" b="0" i="1">
                 <a:solidFill>
-                  <a:srgbClr val="8C8C8C"/>
-                </a:solidFill>
-                <a:latin typeface="Arial"/>
-              </a:rPr>
-              <a:t/>
+                  <a:srgbClr val="828282"/>
+                </a:solidFill>
+                <a:latin typeface="Arial"/>
+              </a:rPr>
+              <a:t>Que doce é segurar um bebê recém-nascido</a:t>
             </a:r>
           </a:p>
         </p:txBody>
@@ -3992,23 +3992,23 @@
         </p:nvSpPr>
         <p:spPr>
           <a:xfrm>
-            <a:off x="594360" y="2258568"/>
-            <a:ext cx="11002975" cy="685800"/>
-          </a:xfrm>
-          <a:prstGeom prst="rect">
-            <a:avLst/>
-          </a:prstGeom>
-          <a:noFill/>
-        </p:spPr>
-        <p:txBody>
-          <a:bodyPr wrap="square">
-            <a:spAutoFit/>
-          </a:bodyPr>
-          <a:lstStyle/>
-          <a:p>
-            <a:pPr algn="ctr"/>
-            <a:r>
-              <a:rPr sz="4022" b="1" i="0">
+            <a:off x="640080" y="2052828"/>
+            <a:ext cx="10911535" cy="731520"/>
+          </a:xfrm>
+          <a:prstGeom prst="rect">
+            <a:avLst/>
+          </a:prstGeom>
+          <a:noFill/>
+        </p:spPr>
+        <p:txBody>
+          <a:bodyPr wrap="square">
+            <a:spAutoFit/>
+          </a:bodyPr>
+          <a:lstStyle/>
+          <a:p>
+            <a:pPr algn="ctr"/>
+            <a:r>
+              <a:rPr sz="4300" b="1" i="0">
                 <a:solidFill>
                   <a:srgbClr val="FFFFFF"/>
                 </a:solidFill>
@@ -4027,29 +4027,29 @@
         </p:nvSpPr>
         <p:spPr>
           <a:xfrm>
-            <a:off x="594360" y="2980944"/>
-            <a:ext cx="11002975" cy="347472"/>
-          </a:xfrm>
-          <a:prstGeom prst="rect">
-            <a:avLst/>
-          </a:prstGeom>
-          <a:noFill/>
-        </p:spPr>
-        <p:txBody>
-          <a:bodyPr wrap="square">
-            <a:spAutoFit/>
-          </a:bodyPr>
-          <a:lstStyle/>
-          <a:p>
-            <a:pPr algn="ctr"/>
-            <a:r>
-              <a:rPr sz="2200" b="0" i="1">
-                <a:solidFill>
-                  <a:srgbClr val="8C8C8C"/>
-                </a:solidFill>
-                <a:latin typeface="Arial"/>
-              </a:rPr>
-              <a:t/>
+            <a:off x="640080" y="2985516"/>
+            <a:ext cx="10911535" cy="731520"/>
+          </a:xfrm>
+          <a:prstGeom prst="rect">
+            <a:avLst/>
+          </a:prstGeom>
+          <a:noFill/>
+        </p:spPr>
+        <p:txBody>
+          <a:bodyPr wrap="square">
+            <a:spAutoFit/>
+          </a:bodyPr>
+          <a:lstStyle/>
+          <a:p>
+            <a:pPr algn="ctr"/>
+            <a:r>
+              <a:rPr sz="4800" b="1" i="0">
+                <a:solidFill>
+                  <a:srgbClr val="FFFFFF"/>
+                </a:solidFill>
+                <a:latin typeface="Arial"/>
+              </a:rPr>
+              <a:t>E a vida vale a pena viver,</a:t>
             </a:r>
           </a:p>
         </p:txBody>
@@ -4062,29 +4062,29 @@
         </p:nvSpPr>
         <p:spPr>
           <a:xfrm>
-            <a:off x="594360" y="3529584"/>
-            <a:ext cx="11002975" cy="685800"/>
-          </a:xfrm>
-          <a:prstGeom prst="rect">
-            <a:avLst/>
-          </a:prstGeom>
-          <a:noFill/>
-        </p:spPr>
-        <p:txBody>
-          <a:bodyPr wrap="square">
-            <a:spAutoFit/>
-          </a:bodyPr>
-          <a:lstStyle/>
-          <a:p>
-            <a:pPr algn="ctr"/>
-            <a:r>
-              <a:rPr sz="4400" b="1" i="0">
-                <a:solidFill>
-                  <a:srgbClr val="FFFFFF"/>
-                </a:solidFill>
-                <a:latin typeface="Arial"/>
-              </a:rPr>
-              <a:t>E a vida vale a pena viver,</a:t>
+            <a:off x="640080" y="4128516"/>
+            <a:ext cx="10911535" cy="310896"/>
+          </a:xfrm>
+          <a:prstGeom prst="rect">
+            <a:avLst/>
+          </a:prstGeom>
+          <a:noFill/>
+        </p:spPr>
+        <p:txBody>
+          <a:bodyPr wrap="square">
+            <a:spAutoFit/>
+          </a:bodyPr>
+          <a:lstStyle/>
+          <a:p>
+            <a:pPr algn="ctr"/>
+            <a:r>
+              <a:rPr sz="2000" b="0" i="0">
+                <a:solidFill>
+                  <a:srgbClr val="828282"/>
+                </a:solidFill>
+                <a:latin typeface="Arial"/>
+              </a:rPr>
+              <a:t>あしたは こわくはない</a:t>
             </a:r>
           </a:p>
         </p:txBody>
@@ -4097,29 +4097,29 @@
         </p:nvSpPr>
         <p:spPr>
           <a:xfrm>
-            <a:off x="594360" y="4251960"/>
-            <a:ext cx="11002975" cy="347472"/>
-          </a:xfrm>
-          <a:prstGeom prst="rect">
-            <a:avLst/>
-          </a:prstGeom>
-          <a:noFill/>
-        </p:spPr>
-        <p:txBody>
-          <a:bodyPr wrap="square">
-            <a:spAutoFit/>
-          </a:bodyPr>
-          <a:lstStyle/>
-          <a:p>
-            <a:pPr algn="ctr"/>
-            <a:r>
-              <a:rPr sz="2200" b="0" i="1">
-                <a:solidFill>
-                  <a:srgbClr val="8C8C8C"/>
-                </a:solidFill>
-                <a:latin typeface="Arial"/>
-              </a:rPr>
-              <a:t/>
+            <a:off x="640080" y="4494276"/>
+            <a:ext cx="10911535" cy="310896"/>
+          </a:xfrm>
+          <a:prstGeom prst="rect">
+            <a:avLst/>
+          </a:prstGeom>
+          <a:noFill/>
+        </p:spPr>
+        <p:txBody>
+          <a:bodyPr wrap="square">
+            <a:spAutoFit/>
+          </a:bodyPr>
+          <a:lstStyle/>
+          <a:p>
+            <a:pPr algn="ctr"/>
+            <a:r>
+              <a:rPr sz="2000" b="0" i="0">
+                <a:solidFill>
+                  <a:srgbClr val="828282"/>
+                </a:solidFill>
+                <a:latin typeface="Arial"/>
+              </a:rPr>
+              <a:t>主イエスが おられる</a:t>
             </a:r>
           </a:p>
         </p:txBody>
@@ -4158,23 +4158,23 @@
         </p:nvSpPr>
         <p:spPr>
           <a:xfrm>
-            <a:off x="594360" y="2258568"/>
-            <a:ext cx="11002975" cy="685800"/>
-          </a:xfrm>
-          <a:prstGeom prst="rect">
-            <a:avLst/>
-          </a:prstGeom>
-          <a:noFill/>
-        </p:spPr>
-        <p:txBody>
-          <a:bodyPr wrap="square">
-            <a:spAutoFit/>
-          </a:bodyPr>
-          <a:lstStyle/>
-          <a:p>
-            <a:pPr algn="ctr"/>
-            <a:r>
-              <a:rPr sz="4400" b="1" i="0">
+            <a:off x="640080" y="2052828"/>
+            <a:ext cx="10911535" cy="731520"/>
+          </a:xfrm>
+          <a:prstGeom prst="rect">
+            <a:avLst/>
+          </a:prstGeom>
+          <a:noFill/>
+        </p:spPr>
+        <p:txBody>
+          <a:bodyPr wrap="square">
+            <a:spAutoFit/>
+          </a:bodyPr>
+          <a:lstStyle/>
+          <a:p>
+            <a:pPr algn="ctr"/>
+            <a:r>
+              <a:rPr sz="4800" b="1" i="0">
                 <a:solidFill>
                   <a:srgbClr val="FFFFFF"/>
                 </a:solidFill>
@@ -4193,29 +4193,29 @@
         </p:nvSpPr>
         <p:spPr>
           <a:xfrm>
-            <a:off x="594360" y="2980944"/>
-            <a:ext cx="11002975" cy="347472"/>
-          </a:xfrm>
-          <a:prstGeom prst="rect">
-            <a:avLst/>
-          </a:prstGeom>
-          <a:noFill/>
-        </p:spPr>
-        <p:txBody>
-          <a:bodyPr wrap="square">
-            <a:spAutoFit/>
-          </a:bodyPr>
-          <a:lstStyle/>
-          <a:p>
-            <a:pPr algn="ctr"/>
-            <a:r>
-              <a:rPr sz="2200" b="0" i="1">
-                <a:solidFill>
-                  <a:srgbClr val="8C8C8C"/>
-                </a:solidFill>
-                <a:latin typeface="Arial"/>
-              </a:rPr>
-              <a:t/>
+            <a:off x="640080" y="2985516"/>
+            <a:ext cx="10911535" cy="731520"/>
+          </a:xfrm>
+          <a:prstGeom prst="rect">
+            <a:avLst/>
+          </a:prstGeom>
+          <a:noFill/>
+        </p:spPr>
+        <p:txBody>
+          <a:bodyPr wrap="square">
+            <a:spAutoFit/>
+          </a:bodyPr>
+          <a:lstStyle/>
+          <a:p>
+            <a:pPr algn="ctr"/>
+            <a:r>
+              <a:rPr sz="3800" b="1" i="0">
+                <a:solidFill>
+                  <a:srgbClr val="FFFFFF"/>
+                </a:solidFill>
+                <a:latin typeface="Arial"/>
+              </a:rPr>
+              <a:t>Que doce é segurar um bebê recém-nascido</a:t>
             </a:r>
           </a:p>
         </p:txBody>
@@ -4228,29 +4228,29 @@
         </p:nvSpPr>
         <p:spPr>
           <a:xfrm>
-            <a:off x="594360" y="3529584"/>
-            <a:ext cx="11002975" cy="685800"/>
-          </a:xfrm>
-          <a:prstGeom prst="rect">
-            <a:avLst/>
-          </a:prstGeom>
-          <a:noFill/>
-        </p:spPr>
-        <p:txBody>
-          <a:bodyPr wrap="square">
-            <a:spAutoFit/>
-          </a:bodyPr>
-          <a:lstStyle/>
-          <a:p>
-            <a:pPr algn="ctr"/>
-            <a:r>
-              <a:rPr sz="3520" b="1" i="0">
-                <a:solidFill>
-                  <a:srgbClr val="FFFFFF"/>
-                </a:solidFill>
-                <a:latin typeface="Arial"/>
-              </a:rPr>
-              <a:t>Que doce é segurar um bebê recém-nascido</a:t>
+            <a:off x="640080" y="4128516"/>
+            <a:ext cx="10911535" cy="310896"/>
+          </a:xfrm>
+          <a:prstGeom prst="rect">
+            <a:avLst/>
+          </a:prstGeom>
+          <a:noFill/>
+        </p:spPr>
+        <p:txBody>
+          <a:bodyPr wrap="square">
+            <a:spAutoFit/>
+          </a:bodyPr>
+          <a:lstStyle/>
+          <a:p>
+            <a:pPr algn="ctr"/>
+            <a:r>
+              <a:rPr sz="2000" b="0" i="0">
+                <a:solidFill>
+                  <a:srgbClr val="828282"/>
+                </a:solidFill>
+                <a:latin typeface="Arial"/>
+              </a:rPr>
+              <a:t>みらいもーまーた みてにある</a:t>
             </a:r>
           </a:p>
         </p:txBody>
@@ -4263,29 +4263,29 @@
         </p:nvSpPr>
         <p:spPr>
           <a:xfrm>
-            <a:off x="594360" y="4251960"/>
-            <a:ext cx="11002975" cy="347472"/>
-          </a:xfrm>
-          <a:prstGeom prst="rect">
-            <a:avLst/>
-          </a:prstGeom>
-          <a:noFill/>
-        </p:spPr>
-        <p:txBody>
-          <a:bodyPr wrap="square">
-            <a:spAutoFit/>
-          </a:bodyPr>
-          <a:lstStyle/>
-          <a:p>
-            <a:pPr algn="ctr"/>
-            <a:r>
-              <a:rPr sz="2200" b="0" i="1">
-                <a:solidFill>
-                  <a:srgbClr val="8C8C8C"/>
-                </a:solidFill>
-                <a:latin typeface="Arial"/>
-              </a:rPr>
-              <a:t/>
+            <a:off x="640080" y="4494276"/>
+            <a:ext cx="10911535" cy="310896"/>
+          </a:xfrm>
+          <a:prstGeom prst="rect">
+            <a:avLst/>
+          </a:prstGeom>
+          <a:noFill/>
+        </p:spPr>
+        <p:txBody>
+          <a:bodyPr wrap="square">
+            <a:spAutoFit/>
+          </a:bodyPr>
+          <a:lstStyle/>
+          <a:p>
+            <a:pPr algn="ctr"/>
+            <a:r>
+              <a:rPr sz="2000" b="0" i="0">
+                <a:solidFill>
+                  <a:srgbClr val="828282"/>
+                </a:solidFill>
+                <a:latin typeface="Arial"/>
+              </a:rPr>
+              <a:t>あしたを生きるいみがある</a:t>
             </a:r>
           </a:p>
         </p:txBody>
@@ -4324,23 +4324,23 @@
         </p:nvSpPr>
         <p:spPr>
           <a:xfrm>
-            <a:off x="594360" y="2894076"/>
-            <a:ext cx="11002975" cy="685800"/>
-          </a:xfrm>
-          <a:prstGeom prst="rect">
-            <a:avLst/>
-          </a:prstGeom>
-          <a:noFill/>
-        </p:spPr>
-        <p:txBody>
-          <a:bodyPr wrap="square">
-            <a:spAutoFit/>
-          </a:bodyPr>
-          <a:lstStyle/>
-          <a:p>
-            <a:pPr algn="ctr"/>
-            <a:r>
-              <a:rPr sz="3434" b="1" i="0">
+            <a:off x="640080" y="2702052"/>
+            <a:ext cx="10911535" cy="731520"/>
+          </a:xfrm>
+          <a:prstGeom prst="rect">
+            <a:avLst/>
+          </a:prstGeom>
+          <a:noFill/>
+        </p:spPr>
+        <p:txBody>
+          <a:bodyPr wrap="square">
+            <a:spAutoFit/>
+          </a:bodyPr>
+          <a:lstStyle/>
+          <a:p>
+            <a:pPr algn="ctr"/>
+            <a:r>
+              <a:rPr sz="3700" b="1" i="0">
                 <a:solidFill>
                   <a:srgbClr val="FFFFFF"/>
                 </a:solidFill>
@@ -4359,29 +4359,29 @@
         </p:nvSpPr>
         <p:spPr>
           <a:xfrm>
-            <a:off x="594360" y="3616452"/>
-            <a:ext cx="11002975" cy="347472"/>
-          </a:xfrm>
-          <a:prstGeom prst="rect">
-            <a:avLst/>
-          </a:prstGeom>
-          <a:noFill/>
-        </p:spPr>
-        <p:txBody>
-          <a:bodyPr wrap="square">
-            <a:spAutoFit/>
-          </a:bodyPr>
-          <a:lstStyle/>
-          <a:p>
-            <a:pPr algn="ctr"/>
-            <a:r>
-              <a:rPr sz="2200" b="0" i="1">
-                <a:solidFill>
-                  <a:srgbClr val="8C8C8C"/>
-                </a:solidFill>
-                <a:latin typeface="Arial"/>
-              </a:rPr>
-              <a:t/>
+            <a:off x="640080" y="3845052"/>
+            <a:ext cx="10911535" cy="310896"/>
+          </a:xfrm>
+          <a:prstGeom prst="rect">
+            <a:avLst/>
+          </a:prstGeom>
+          <a:noFill/>
+        </p:spPr>
+        <p:txBody>
+          <a:bodyPr wrap="square">
+            <a:spAutoFit/>
+          </a:bodyPr>
+          <a:lstStyle/>
+          <a:p>
+            <a:pPr algn="ctr"/>
+            <a:r>
+              <a:rPr sz="2000" b="0" i="0">
+                <a:solidFill>
+                  <a:srgbClr val="828282"/>
+                </a:solidFill>
+                <a:latin typeface="Arial"/>
+              </a:rPr>
+              <a:t>あしたは こわくはない</a:t>
             </a:r>
           </a:p>
         </p:txBody>
@@ -4420,23 +4420,23 @@
         </p:nvSpPr>
         <p:spPr>
           <a:xfrm>
-            <a:off x="594360" y="2258568"/>
-            <a:ext cx="11002975" cy="685800"/>
-          </a:xfrm>
-          <a:prstGeom prst="rect">
-            <a:avLst/>
-          </a:prstGeom>
-          <a:noFill/>
-        </p:spPr>
-        <p:txBody>
-          <a:bodyPr wrap="square">
-            <a:spAutoFit/>
-          </a:bodyPr>
-          <a:lstStyle/>
-          <a:p>
-            <a:pPr algn="ctr"/>
-            <a:r>
-              <a:rPr sz="3911" b="1" i="0">
+            <a:off x="640080" y="2052828"/>
+            <a:ext cx="10911535" cy="731520"/>
+          </a:xfrm>
+          <a:prstGeom prst="rect">
+            <a:avLst/>
+          </a:prstGeom>
+          <a:noFill/>
+        </p:spPr>
+        <p:txBody>
+          <a:bodyPr wrap="square">
+            <a:spAutoFit/>
+          </a:bodyPr>
+          <a:lstStyle/>
+          <a:p>
+            <a:pPr algn="ctr"/>
+            <a:r>
+              <a:rPr sz="4200" b="1" i="0">
                 <a:solidFill>
                   <a:srgbClr val="FFFFFF"/>
                 </a:solidFill>
@@ -4455,29 +4455,29 @@
         </p:nvSpPr>
         <p:spPr>
           <a:xfrm>
-            <a:off x="594360" y="2980944"/>
-            <a:ext cx="11002975" cy="347472"/>
-          </a:xfrm>
-          <a:prstGeom prst="rect">
-            <a:avLst/>
-          </a:prstGeom>
-          <a:noFill/>
-        </p:spPr>
-        <p:txBody>
-          <a:bodyPr wrap="square">
-            <a:spAutoFit/>
-          </a:bodyPr>
-          <a:lstStyle/>
-          <a:p>
-            <a:pPr algn="ctr"/>
-            <a:r>
-              <a:rPr sz="2200" b="0" i="1">
-                <a:solidFill>
-                  <a:srgbClr val="8C8C8C"/>
-                </a:solidFill>
-                <a:latin typeface="Arial"/>
-              </a:rPr>
-              <a:t/>
+            <a:off x="640080" y="2985516"/>
+            <a:ext cx="10911535" cy="731520"/>
+          </a:xfrm>
+          <a:prstGeom prst="rect">
+            <a:avLst/>
+          </a:prstGeom>
+          <a:noFill/>
+        </p:spPr>
+        <p:txBody>
+          <a:bodyPr wrap="square">
+            <a:spAutoFit/>
+          </a:bodyPr>
+          <a:lstStyle/>
+          <a:p>
+            <a:pPr algn="ctr"/>
+            <a:r>
+              <a:rPr sz="4000" b="1" i="0">
+                <a:solidFill>
+                  <a:srgbClr val="FFFFFF"/>
+                </a:solidFill>
+                <a:latin typeface="Arial"/>
+              </a:rPr>
+              <a:t>Viveu e morreu para comprar-me perdão.</a:t>
             </a:r>
           </a:p>
         </p:txBody>
@@ -4490,29 +4490,29 @@
         </p:nvSpPr>
         <p:spPr>
           <a:xfrm>
-            <a:off x="594360" y="3529584"/>
-            <a:ext cx="11002975" cy="685800"/>
-          </a:xfrm>
-          <a:prstGeom prst="rect">
-            <a:avLst/>
-          </a:prstGeom>
-          <a:noFill/>
-        </p:spPr>
-        <p:txBody>
-          <a:bodyPr wrap="square">
-            <a:spAutoFit/>
-          </a:bodyPr>
-          <a:lstStyle/>
-          <a:p>
-            <a:pPr algn="ctr"/>
-            <a:r>
-              <a:rPr sz="3705" b="1" i="0">
-                <a:solidFill>
-                  <a:srgbClr val="FFFFFF"/>
-                </a:solidFill>
-                <a:latin typeface="Arial"/>
-              </a:rPr>
-              <a:t>Viveu e morreu para comprar-me perdão.</a:t>
+            <a:off x="640080" y="4128516"/>
+            <a:ext cx="10911535" cy="310896"/>
+          </a:xfrm>
+          <a:prstGeom prst="rect">
+            <a:avLst/>
+          </a:prstGeom>
+          <a:noFill/>
+        </p:spPr>
+        <p:txBody>
+          <a:bodyPr wrap="square">
+            <a:spAutoFit/>
+          </a:bodyPr>
+          <a:lstStyle/>
+          <a:p>
+            <a:pPr algn="ctr"/>
+            <a:r>
+              <a:rPr sz="2000" b="0" i="0">
+                <a:solidFill>
+                  <a:srgbClr val="828282"/>
+                </a:solidFill>
+                <a:latin typeface="Arial"/>
+              </a:rPr>
+              <a:t>死にかち よみがえり</a:t>
             </a:r>
           </a:p>
         </p:txBody>
@@ -4525,29 +4525,29 @@
         </p:nvSpPr>
         <p:spPr>
           <a:xfrm>
-            <a:off x="594360" y="4251960"/>
-            <a:ext cx="11002975" cy="347472"/>
-          </a:xfrm>
-          <a:prstGeom prst="rect">
-            <a:avLst/>
-          </a:prstGeom>
-          <a:noFill/>
-        </p:spPr>
-        <p:txBody>
-          <a:bodyPr wrap="square">
-            <a:spAutoFit/>
-          </a:bodyPr>
-          <a:lstStyle/>
-          <a:p>
-            <a:pPr algn="ctr"/>
-            <a:r>
-              <a:rPr sz="2200" b="0" i="1">
-                <a:solidFill>
-                  <a:srgbClr val="8C8C8C"/>
-                </a:solidFill>
-                <a:latin typeface="Arial"/>
-              </a:rPr>
-              <a:t/>
+            <a:off x="640080" y="4494276"/>
+            <a:ext cx="10911535" cy="310896"/>
+          </a:xfrm>
+          <a:prstGeom prst="rect">
+            <a:avLst/>
+          </a:prstGeom>
+          <a:noFill/>
+        </p:spPr>
+        <p:txBody>
+          <a:bodyPr wrap="square">
+            <a:spAutoFit/>
+          </a:bodyPr>
+          <a:lstStyle/>
+          <a:p>
+            <a:pPr algn="ctr"/>
+            <a:r>
+              <a:rPr sz="2000" b="0" i="0">
+                <a:solidFill>
+                  <a:srgbClr val="828282"/>
+                </a:solidFill>
+                <a:latin typeface="Arial"/>
+              </a:rPr>
+              <a:t>今も生きつづけておられ</a:t>
             </a:r>
           </a:p>
         </p:txBody>
@@ -4586,23 +4586,23 @@
         </p:nvSpPr>
         <p:spPr>
           <a:xfrm>
-            <a:off x="594360" y="1837944"/>
-            <a:ext cx="11002975" cy="685800"/>
-          </a:xfrm>
-          <a:prstGeom prst="rect">
-            <a:avLst/>
-          </a:prstGeom>
-          <a:noFill/>
-        </p:spPr>
-        <p:txBody>
-          <a:bodyPr wrap="square">
-            <a:spAutoFit/>
-          </a:bodyPr>
-          <a:lstStyle/>
-          <a:p>
-            <a:pPr algn="ctr"/>
-            <a:r>
-              <a:rPr sz="4400" b="1" i="0">
+            <a:off x="640080" y="1650492"/>
+            <a:ext cx="10911535" cy="731520"/>
+          </a:xfrm>
+          <a:prstGeom prst="rect">
+            <a:avLst/>
+          </a:prstGeom>
+          <a:noFill/>
+        </p:spPr>
+        <p:txBody>
+          <a:bodyPr wrap="square">
+            <a:spAutoFit/>
+          </a:bodyPr>
+          <a:lstStyle/>
+          <a:p>
+            <a:pPr algn="ctr"/>
+            <a:r>
+              <a:rPr sz="4800" b="1" i="0">
                 <a:solidFill>
                   <a:srgbClr val="FFFFFF"/>
                 </a:solidFill>
@@ -4621,8 +4621,8 @@
         </p:nvSpPr>
         <p:spPr>
           <a:xfrm>
-            <a:off x="594360" y="2560320"/>
-            <a:ext cx="11002975" cy="384048"/>
+            <a:off x="640080" y="2418588"/>
+            <a:ext cx="10911535" cy="365760"/>
           </a:xfrm>
           <a:prstGeom prst="rect">
             <a:avLst/>
@@ -4639,7 +4639,7 @@
             <a:r>
               <a:rPr sz="2400" b="0" i="1">
                 <a:solidFill>
-                  <a:srgbClr val="B4B4B4"/>
+                  <a:srgbClr val="AAAAAA"/>
                 </a:solidFill>
                 <a:latin typeface="Arial"/>
               </a:rPr>
@@ -4656,8 +4656,78 @@
         </p:nvSpPr>
         <p:spPr>
           <a:xfrm>
-            <a:off x="594360" y="2980944"/>
-            <a:ext cx="11002975" cy="347472"/>
+            <a:off x="640080" y="2985516"/>
+            <a:ext cx="10911535" cy="731520"/>
+          </a:xfrm>
+          <a:prstGeom prst="rect">
+            <a:avLst/>
+          </a:prstGeom>
+          <a:noFill/>
+        </p:spPr>
+        <p:txBody>
+          <a:bodyPr wrap="square">
+            <a:spAutoFit/>
+          </a:bodyPr>
+          <a:lstStyle/>
+          <a:p>
+            <a:pPr algn="ctr"/>
+            <a:r>
+              <a:rPr sz="4800" b="1" i="0">
+                <a:solidFill>
+                  <a:srgbClr val="FFFFFF"/>
+                </a:solidFill>
+                <a:latin typeface="Arial"/>
+              </a:rPr>
+              <a:t>主イエスは来られて</a:t>
+            </a:r>
+          </a:p>
+        </p:txBody>
+      </p:sp>
+      <p:sp>
+        <p:nvSpPr>
+          <p:cNvPr id="5" name="TextBox 4"/>
+          <p:cNvSpPr txBox="1"/>
+          <p:nvPr/>
+        </p:nvSpPr>
+        <p:spPr>
+          <a:xfrm>
+            <a:off x="640080" y="3753612"/>
+            <a:ext cx="10911535" cy="365760"/>
+          </a:xfrm>
+          <a:prstGeom prst="rect">
+            <a:avLst/>
+          </a:prstGeom>
+          <a:noFill/>
+        </p:spPr>
+        <p:txBody>
+          <a:bodyPr wrap="square">
+            <a:spAutoFit/>
+          </a:bodyPr>
+          <a:lstStyle/>
+          <a:p>
+            <a:pPr algn="ctr"/>
+            <a:r>
+              <a:rPr sz="2400" b="0" i="1">
+                <a:solidFill>
+                  <a:srgbClr val="AAAAAA"/>
+                </a:solidFill>
+                <a:latin typeface="Arial"/>
+              </a:rPr>
+              <a:t>shu iesu wa korarete</a:t>
+            </a:r>
+          </a:p>
+        </p:txBody>
+      </p:sp>
+      <p:sp>
+        <p:nvSpPr>
+          <p:cNvPr id="6" name="TextBox 5"/>
+          <p:cNvSpPr txBox="1"/>
+          <p:nvPr/>
+        </p:nvSpPr>
+        <p:spPr>
+          <a:xfrm>
+            <a:off x="640080" y="4530852"/>
+            <a:ext cx="10911535" cy="310896"/>
           </a:xfrm>
           <a:prstGeom prst="rect">
             <a:avLst/>
@@ -4674,81 +4744,11 @@
             <a:r>
               <a:rPr sz="2000" b="0" i="1">
                 <a:solidFill>
-                  <a:srgbClr val="8C8C8C"/>
-                </a:solidFill>
-                <a:latin typeface="Arial"/>
-              </a:rPr>
-              <a:t/>
-            </a:r>
-          </a:p>
-        </p:txBody>
-      </p:sp>
-      <p:sp>
-        <p:nvSpPr>
-          <p:cNvPr id="5" name="TextBox 4"/>
-          <p:cNvSpPr txBox="1"/>
-          <p:nvPr/>
-        </p:nvSpPr>
-        <p:spPr>
-          <a:xfrm>
-            <a:off x="594360" y="3529584"/>
-            <a:ext cx="11002975" cy="685800"/>
-          </a:xfrm>
-          <a:prstGeom prst="rect">
-            <a:avLst/>
-          </a:prstGeom>
-          <a:noFill/>
-        </p:spPr>
-        <p:txBody>
-          <a:bodyPr wrap="square">
-            <a:spAutoFit/>
-          </a:bodyPr>
-          <a:lstStyle/>
-          <a:p>
-            <a:pPr algn="ctr"/>
-            <a:r>
-              <a:rPr sz="4400" b="1" i="0">
-                <a:solidFill>
-                  <a:srgbClr val="FFFFFF"/>
-                </a:solidFill>
-                <a:latin typeface="Arial"/>
-              </a:rPr>
-              <a:t>主イエスは来られて</a:t>
-            </a:r>
-          </a:p>
-        </p:txBody>
-      </p:sp>
-      <p:sp>
-        <p:nvSpPr>
-          <p:cNvPr id="6" name="TextBox 5"/>
-          <p:cNvSpPr txBox="1"/>
-          <p:nvPr/>
-        </p:nvSpPr>
-        <p:spPr>
-          <a:xfrm>
-            <a:off x="594360" y="4251960"/>
-            <a:ext cx="11002975" cy="384048"/>
-          </a:xfrm>
-          <a:prstGeom prst="rect">
-            <a:avLst/>
-          </a:prstGeom>
-          <a:noFill/>
-        </p:spPr>
-        <p:txBody>
-          <a:bodyPr wrap="square">
-            <a:spAutoFit/>
-          </a:bodyPr>
-          <a:lstStyle/>
-          <a:p>
-            <a:pPr algn="ctr"/>
-            <a:r>
-              <a:rPr sz="2400" b="0" i="1">
-                <a:solidFill>
-                  <a:srgbClr val="B4B4B4"/>
-                </a:solidFill>
-                <a:latin typeface="Arial"/>
-              </a:rPr>
-              <a:t>shu iesu wa korarete</a:t>
+                  <a:srgbClr val="828282"/>
+                </a:solidFill>
+                <a:latin typeface="Arial"/>
+              </a:rPr>
+              <a:t>Porque ele vive</a:t>
             </a:r>
           </a:p>
         </p:txBody>
@@ -4761,8 +4761,8 @@
         </p:nvSpPr>
         <p:spPr>
           <a:xfrm>
-            <a:off x="594360" y="4672584"/>
-            <a:ext cx="11002975" cy="347472"/>
+            <a:off x="640080" y="4896612"/>
+            <a:ext cx="10911535" cy="310896"/>
           </a:xfrm>
           <a:prstGeom prst="rect">
             <a:avLst/>
@@ -4779,11 +4779,11 @@
             <a:r>
               <a:rPr sz="2000" b="0" i="1">
                 <a:solidFill>
-                  <a:srgbClr val="8C8C8C"/>
-                </a:solidFill>
-                <a:latin typeface="Arial"/>
-              </a:rPr>
-              <a:t/>
+                  <a:srgbClr val="828282"/>
+                </a:solidFill>
+                <a:latin typeface="Arial"/>
+              </a:rPr>
+              <a:t>Deus enviou Seu Filho. Eles o chamaram Jesus.</a:t>
             </a:r>
           </a:p>
         </p:txBody>
@@ -4822,23 +4822,23 @@
         </p:nvSpPr>
         <p:spPr>
           <a:xfrm>
-            <a:off x="594360" y="1837944"/>
-            <a:ext cx="11002975" cy="685800"/>
-          </a:xfrm>
-          <a:prstGeom prst="rect">
-            <a:avLst/>
-          </a:prstGeom>
-          <a:noFill/>
-        </p:spPr>
-        <p:txBody>
-          <a:bodyPr wrap="square">
-            <a:spAutoFit/>
-          </a:bodyPr>
-          <a:lstStyle/>
-          <a:p>
-            <a:pPr algn="ctr"/>
-            <a:r>
-              <a:rPr sz="4400" b="1" i="0">
+            <a:off x="640080" y="1650492"/>
+            <a:ext cx="10911535" cy="731520"/>
+          </a:xfrm>
+          <a:prstGeom prst="rect">
+            <a:avLst/>
+          </a:prstGeom>
+          <a:noFill/>
+        </p:spPr>
+        <p:txBody>
+          <a:bodyPr wrap="square">
+            <a:spAutoFit/>
+          </a:bodyPr>
+          <a:lstStyle/>
+          <a:p>
+            <a:pPr algn="ctr"/>
+            <a:r>
+              <a:rPr sz="4800" b="1" i="0">
                 <a:solidFill>
                   <a:srgbClr val="FFFFFF"/>
                 </a:solidFill>
@@ -4857,8 +4857,8 @@
         </p:nvSpPr>
         <p:spPr>
           <a:xfrm>
-            <a:off x="594360" y="2560320"/>
-            <a:ext cx="11002975" cy="384048"/>
+            <a:off x="640080" y="2418588"/>
+            <a:ext cx="10911535" cy="365760"/>
           </a:xfrm>
           <a:prstGeom prst="rect">
             <a:avLst/>
@@ -4875,7 +4875,7 @@
             <a:r>
               <a:rPr sz="2400" b="0" i="1">
                 <a:solidFill>
-                  <a:srgbClr val="B4B4B4"/>
+                  <a:srgbClr val="AAAAAA"/>
                 </a:solidFill>
                 <a:latin typeface="Arial"/>
               </a:rPr>
@@ -4892,8 +4892,78 @@
         </p:nvSpPr>
         <p:spPr>
           <a:xfrm>
-            <a:off x="594360" y="2980944"/>
-            <a:ext cx="11002975" cy="347472"/>
+            <a:off x="640080" y="2985516"/>
+            <a:ext cx="10911535" cy="731520"/>
+          </a:xfrm>
+          <a:prstGeom prst="rect">
+            <a:avLst/>
+          </a:prstGeom>
+          <a:noFill/>
+        </p:spPr>
+        <p:txBody>
+          <a:bodyPr wrap="square">
+            <a:spAutoFit/>
+          </a:bodyPr>
+          <a:lstStyle/>
+          <a:p>
+            <a:pPr algn="ctr"/>
+            <a:r>
+              <a:rPr sz="4800" b="1" i="0">
+                <a:solidFill>
+                  <a:srgbClr val="FFFFFF"/>
+                </a:solidFill>
+                <a:latin typeface="Arial"/>
+              </a:rPr>
+              <a:t>今も生きつづけておられ</a:t>
+            </a:r>
+          </a:p>
+        </p:txBody>
+      </p:sp>
+      <p:sp>
+        <p:nvSpPr>
+          <p:cNvPr id="5" name="TextBox 4"/>
+          <p:cNvSpPr txBox="1"/>
+          <p:nvPr/>
+        </p:nvSpPr>
+        <p:spPr>
+          <a:xfrm>
+            <a:off x="640080" y="3753612"/>
+            <a:ext cx="10911535" cy="365760"/>
+          </a:xfrm>
+          <a:prstGeom prst="rect">
+            <a:avLst/>
+          </a:prstGeom>
+          <a:noFill/>
+        </p:spPr>
+        <p:txBody>
+          <a:bodyPr wrap="square">
+            <a:spAutoFit/>
+          </a:bodyPr>
+          <a:lstStyle/>
+          <a:p>
+            <a:pPr algn="ctr"/>
+            <a:r>
+              <a:rPr sz="2400" b="0" i="1">
+                <a:solidFill>
+                  <a:srgbClr val="AAAAAA"/>
+                </a:solidFill>
+                <a:latin typeface="Arial"/>
+              </a:rPr>
+              <a:t>ima mo iki tsuzukete orare</a:t>
+            </a:r>
+          </a:p>
+        </p:txBody>
+      </p:sp>
+      <p:sp>
+        <p:nvSpPr>
+          <p:cNvPr id="6" name="TextBox 5"/>
+          <p:cNvSpPr txBox="1"/>
+          <p:nvPr/>
+        </p:nvSpPr>
+        <p:spPr>
+          <a:xfrm>
+            <a:off x="640080" y="4530852"/>
+            <a:ext cx="10911535" cy="310896"/>
           </a:xfrm>
           <a:prstGeom prst="rect">
             <a:avLst/>
@@ -4910,81 +4980,11 @@
             <a:r>
               <a:rPr sz="2000" b="0" i="1">
                 <a:solidFill>
-                  <a:srgbClr val="8C8C8C"/>
-                </a:solidFill>
-                <a:latin typeface="Arial"/>
-              </a:rPr>
-              <a:t/>
-            </a:r>
-          </a:p>
-        </p:txBody>
-      </p:sp>
-      <p:sp>
-        <p:nvSpPr>
-          <p:cNvPr id="5" name="TextBox 4"/>
-          <p:cNvSpPr txBox="1"/>
-          <p:nvPr/>
-        </p:nvSpPr>
-        <p:spPr>
-          <a:xfrm>
-            <a:off x="594360" y="3529584"/>
-            <a:ext cx="11002975" cy="685800"/>
-          </a:xfrm>
-          <a:prstGeom prst="rect">
-            <a:avLst/>
-          </a:prstGeom>
-          <a:noFill/>
-        </p:spPr>
-        <p:txBody>
-          <a:bodyPr wrap="square">
-            <a:spAutoFit/>
-          </a:bodyPr>
-          <a:lstStyle/>
-          <a:p>
-            <a:pPr algn="ctr"/>
-            <a:r>
-              <a:rPr sz="4400" b="1" i="0">
-                <a:solidFill>
-                  <a:srgbClr val="FFFFFF"/>
-                </a:solidFill>
-                <a:latin typeface="Arial"/>
-              </a:rPr>
-              <a:t>今も生きつづけておられ</a:t>
-            </a:r>
-          </a:p>
-        </p:txBody>
-      </p:sp>
-      <p:sp>
-        <p:nvSpPr>
-          <p:cNvPr id="6" name="TextBox 5"/>
-          <p:cNvSpPr txBox="1"/>
-          <p:nvPr/>
-        </p:nvSpPr>
-        <p:spPr>
-          <a:xfrm>
-            <a:off x="594360" y="4251960"/>
-            <a:ext cx="11002975" cy="384048"/>
-          </a:xfrm>
-          <a:prstGeom prst="rect">
-            <a:avLst/>
-          </a:prstGeom>
-          <a:noFill/>
-        </p:spPr>
-        <p:txBody>
-          <a:bodyPr wrap="square">
-            <a:spAutoFit/>
-          </a:bodyPr>
-          <a:lstStyle/>
-          <a:p>
-            <a:pPr algn="ctr"/>
-            <a:r>
-              <a:rPr sz="2400" b="0" i="1">
-                <a:solidFill>
-                  <a:srgbClr val="B4B4B4"/>
-                </a:solidFill>
-                <a:latin typeface="Arial"/>
-              </a:rPr>
-              <a:t>ima mo iki tsuzukete orare</a:t>
+                  <a:srgbClr val="828282"/>
+                </a:solidFill>
+                <a:latin typeface="Arial"/>
+              </a:rPr>
+              <a:t>Ele veio para amar, curar e perdoar;</a:t>
             </a:r>
           </a:p>
         </p:txBody>
@@ -4997,8 +4997,8 @@
         </p:nvSpPr>
         <p:spPr>
           <a:xfrm>
-            <a:off x="594360" y="4672584"/>
-            <a:ext cx="11002975" cy="347472"/>
+            <a:off x="640080" y="4896612"/>
+            <a:ext cx="10911535" cy="310896"/>
           </a:xfrm>
           <a:prstGeom prst="rect">
             <a:avLst/>
@@ -5015,11 +5015,11 @@
             <a:r>
               <a:rPr sz="2000" b="0" i="1">
                 <a:solidFill>
-                  <a:srgbClr val="8C8C8C"/>
-                </a:solidFill>
-                <a:latin typeface="Arial"/>
-              </a:rPr>
-              <a:t/>
+                  <a:srgbClr val="828282"/>
+                </a:solidFill>
+                <a:latin typeface="Arial"/>
+              </a:rPr>
+              <a:t>Viveu e morreu para comprar-me perdão.</a:t>
             </a:r>
           </a:p>
         </p:txBody>
@@ -5058,23 +5058,23 @@
         </p:nvSpPr>
         <p:spPr>
           <a:xfrm>
-            <a:off x="594360" y="1837944"/>
-            <a:ext cx="11002975" cy="685800"/>
-          </a:xfrm>
-          <a:prstGeom prst="rect">
-            <a:avLst/>
-          </a:prstGeom>
-          <a:noFill/>
-        </p:spPr>
-        <p:txBody>
-          <a:bodyPr wrap="square">
-            <a:spAutoFit/>
-          </a:bodyPr>
-          <a:lstStyle/>
-          <a:p>
-            <a:pPr algn="ctr"/>
-            <a:r>
-              <a:rPr sz="4400" b="1" i="0">
+            <a:off x="640080" y="1650492"/>
+            <a:ext cx="10911535" cy="731520"/>
+          </a:xfrm>
+          <a:prstGeom prst="rect">
+            <a:avLst/>
+          </a:prstGeom>
+          <a:noFill/>
+        </p:spPr>
+        <p:txBody>
+          <a:bodyPr wrap="square">
+            <a:spAutoFit/>
+          </a:bodyPr>
+          <a:lstStyle/>
+          <a:p>
+            <a:pPr algn="ctr"/>
+            <a:r>
+              <a:rPr sz="4800" b="1" i="0">
                 <a:solidFill>
                   <a:srgbClr val="FFFFFF"/>
                 </a:solidFill>
@@ -5093,8 +5093,8 @@
         </p:nvSpPr>
         <p:spPr>
           <a:xfrm>
-            <a:off x="594360" y="2560320"/>
-            <a:ext cx="11002975" cy="384048"/>
+            <a:off x="640080" y="2418588"/>
+            <a:ext cx="10911535" cy="365760"/>
           </a:xfrm>
           <a:prstGeom prst="rect">
             <a:avLst/>
@@ -5111,7 +5111,7 @@
             <a:r>
               <a:rPr sz="2400" b="0" i="1">
                 <a:solidFill>
-                  <a:srgbClr val="B4B4B4"/>
+                  <a:srgbClr val="AAAAAA"/>
                 </a:solidFill>
                 <a:latin typeface="Arial"/>
               </a:rPr>
@@ -5128,8 +5128,78 @@
         </p:nvSpPr>
         <p:spPr>
           <a:xfrm>
-            <a:off x="594360" y="2980944"/>
-            <a:ext cx="11002975" cy="347472"/>
+            <a:off x="640080" y="2985516"/>
+            <a:ext cx="10911535" cy="731520"/>
+          </a:xfrm>
+          <a:prstGeom prst="rect">
+            <a:avLst/>
+          </a:prstGeom>
+          <a:noFill/>
+        </p:spPr>
+        <p:txBody>
+          <a:bodyPr wrap="square">
+            <a:spAutoFit/>
+          </a:bodyPr>
+          <a:lstStyle/>
+          <a:p>
+            <a:pPr algn="ctr"/>
+            <a:r>
+              <a:rPr sz="4800" b="1" i="0">
+                <a:solidFill>
+                  <a:srgbClr val="FFFFFF"/>
+                </a:solidFill>
+                <a:latin typeface="Arial"/>
+              </a:rPr>
+              <a:t>主イエスが おられる</a:t>
+            </a:r>
+          </a:p>
+        </p:txBody>
+      </p:sp>
+      <p:sp>
+        <p:nvSpPr>
+          <p:cNvPr id="5" name="TextBox 4"/>
+          <p:cNvSpPr txBox="1"/>
+          <p:nvPr/>
+        </p:nvSpPr>
+        <p:spPr>
+          <a:xfrm>
+            <a:off x="640080" y="3753612"/>
+            <a:ext cx="10911535" cy="365760"/>
+          </a:xfrm>
+          <a:prstGeom prst="rect">
+            <a:avLst/>
+          </a:prstGeom>
+          <a:noFill/>
+        </p:spPr>
+        <p:txBody>
+          <a:bodyPr wrap="square">
+            <a:spAutoFit/>
+          </a:bodyPr>
+          <a:lstStyle/>
+          <a:p>
+            <a:pPr algn="ctr"/>
+            <a:r>
+              <a:rPr sz="2400" b="0" i="1">
+                <a:solidFill>
+                  <a:srgbClr val="AAAAAA"/>
+                </a:solidFill>
+                <a:latin typeface="Arial"/>
+              </a:rPr>
+              <a:t>shu iesu ga orareru</a:t>
+            </a:r>
+          </a:p>
+        </p:txBody>
+      </p:sp>
+      <p:sp>
+        <p:nvSpPr>
+          <p:cNvPr id="6" name="TextBox 5"/>
+          <p:cNvSpPr txBox="1"/>
+          <p:nvPr/>
+        </p:nvSpPr>
+        <p:spPr>
+          <a:xfrm>
+            <a:off x="640080" y="4530852"/>
+            <a:ext cx="10911535" cy="310896"/>
           </a:xfrm>
           <a:prstGeom prst="rect">
             <a:avLst/>
@@ -5146,81 +5216,11 @@
             <a:r>
               <a:rPr sz="2000" b="0" i="1">
                 <a:solidFill>
-                  <a:srgbClr val="8C8C8C"/>
-                </a:solidFill>
-                <a:latin typeface="Arial"/>
-              </a:rPr>
-              <a:t/>
-            </a:r>
-          </a:p>
-        </p:txBody>
-      </p:sp>
-      <p:sp>
-        <p:nvSpPr>
-          <p:cNvPr id="5" name="TextBox 4"/>
-          <p:cNvSpPr txBox="1"/>
-          <p:nvPr/>
-        </p:nvSpPr>
-        <p:spPr>
-          <a:xfrm>
-            <a:off x="594360" y="3529584"/>
-            <a:ext cx="11002975" cy="685800"/>
-          </a:xfrm>
-          <a:prstGeom prst="rect">
-            <a:avLst/>
-          </a:prstGeom>
-          <a:noFill/>
-        </p:spPr>
-        <p:txBody>
-          <a:bodyPr wrap="square">
-            <a:spAutoFit/>
-          </a:bodyPr>
-          <a:lstStyle/>
-          <a:p>
-            <a:pPr algn="ctr"/>
-            <a:r>
-              <a:rPr sz="4400" b="1" i="0">
-                <a:solidFill>
-                  <a:srgbClr val="FFFFFF"/>
-                </a:solidFill>
-                <a:latin typeface="Arial"/>
-              </a:rPr>
-              <a:t>主イエスが おられる</a:t>
-            </a:r>
-          </a:p>
-        </p:txBody>
-      </p:sp>
-      <p:sp>
-        <p:nvSpPr>
-          <p:cNvPr id="6" name="TextBox 5"/>
-          <p:cNvSpPr txBox="1"/>
-          <p:nvPr/>
-        </p:nvSpPr>
-        <p:spPr>
-          <a:xfrm>
-            <a:off x="594360" y="4251960"/>
-            <a:ext cx="11002975" cy="384048"/>
-          </a:xfrm>
-          <a:prstGeom prst="rect">
-            <a:avLst/>
-          </a:prstGeom>
-          <a:noFill/>
-        </p:spPr>
-        <p:txBody>
-          <a:bodyPr wrap="square">
-            <a:spAutoFit/>
-          </a:bodyPr>
-          <a:lstStyle/>
-          <a:p>
-            <a:pPr algn="ctr"/>
-            <a:r>
-              <a:rPr sz="2400" b="0" i="1">
-                <a:solidFill>
-                  <a:srgbClr val="B4B4B4"/>
-                </a:solidFill>
-                <a:latin typeface="Arial"/>
-              </a:rPr>
-              <a:t>shu iesu ga orareru</a:t>
+                  <a:srgbClr val="828282"/>
+                </a:solidFill>
+                <a:latin typeface="Arial"/>
+              </a:rPr>
+              <a:t>Porque eu sei, Ele garante o futuro</a:t>
             </a:r>
           </a:p>
         </p:txBody>
@@ -5233,8 +5233,8 @@
         </p:nvSpPr>
         <p:spPr>
           <a:xfrm>
-            <a:off x="594360" y="4672584"/>
-            <a:ext cx="11002975" cy="347472"/>
+            <a:off x="640080" y="4896612"/>
+            <a:ext cx="10911535" cy="310896"/>
           </a:xfrm>
           <a:prstGeom prst="rect">
             <a:avLst/>
@@ -5251,11 +5251,11 @@
             <a:r>
               <a:rPr sz="2000" b="0" i="1">
                 <a:solidFill>
-                  <a:srgbClr val="8C8C8C"/>
-                </a:solidFill>
-                <a:latin typeface="Arial"/>
-              </a:rPr>
-              <a:t/>
+                  <a:srgbClr val="828282"/>
+                </a:solidFill>
+                <a:latin typeface="Arial"/>
+              </a:rPr>
+              <a:t>E a vida vale a pena viver,</a:t>
             </a:r>
           </a:p>
         </p:txBody>
@@ -5294,23 +5294,23 @@
         </p:nvSpPr>
         <p:spPr>
           <a:xfrm>
-            <a:off x="594360" y="1837944"/>
-            <a:ext cx="11002975" cy="685800"/>
-          </a:xfrm>
-          <a:prstGeom prst="rect">
-            <a:avLst/>
-          </a:prstGeom>
-          <a:noFill/>
-        </p:spPr>
-        <p:txBody>
-          <a:bodyPr wrap="square">
-            <a:spAutoFit/>
-          </a:bodyPr>
-          <a:lstStyle/>
-          <a:p>
-            <a:pPr algn="ctr"/>
-            <a:r>
-              <a:rPr sz="4400" b="1" i="0">
+            <a:off x="640080" y="1650492"/>
+            <a:ext cx="10911535" cy="731520"/>
+          </a:xfrm>
+          <a:prstGeom prst="rect">
+            <a:avLst/>
+          </a:prstGeom>
+          <a:noFill/>
+        </p:spPr>
+        <p:txBody>
+          <a:bodyPr wrap="square">
+            <a:spAutoFit/>
+          </a:bodyPr>
+          <a:lstStyle/>
+          <a:p>
+            <a:pPr algn="ctr"/>
+            <a:r>
+              <a:rPr sz="4800" b="1" i="0">
                 <a:solidFill>
                   <a:srgbClr val="FFFFFF"/>
                 </a:solidFill>
@@ -5329,8 +5329,8 @@
         </p:nvSpPr>
         <p:spPr>
           <a:xfrm>
-            <a:off x="594360" y="2560320"/>
-            <a:ext cx="11002975" cy="384048"/>
+            <a:off x="640080" y="2418588"/>
+            <a:ext cx="10911535" cy="365760"/>
           </a:xfrm>
           <a:prstGeom prst="rect">
             <a:avLst/>
@@ -5347,7 +5347,7 @@
             <a:r>
               <a:rPr sz="2400" b="0" i="1">
                 <a:solidFill>
-                  <a:srgbClr val="B4B4B4"/>
+                  <a:srgbClr val="AAAAAA"/>
                 </a:solidFill>
                 <a:latin typeface="Arial"/>
               </a:rPr>
@@ -5364,8 +5364,78 @@
         </p:nvSpPr>
         <p:spPr>
           <a:xfrm>
-            <a:off x="594360" y="2980944"/>
-            <a:ext cx="11002975" cy="347472"/>
+            <a:off x="640080" y="2985516"/>
+            <a:ext cx="10911535" cy="731520"/>
+          </a:xfrm>
+          <a:prstGeom prst="rect">
+            <a:avLst/>
+          </a:prstGeom>
+          <a:noFill/>
+        </p:spPr>
+        <p:txBody>
+          <a:bodyPr wrap="square">
+            <a:spAutoFit/>
+          </a:bodyPr>
+          <a:lstStyle/>
+          <a:p>
+            <a:pPr algn="ctr"/>
+            <a:r>
+              <a:rPr sz="4800" b="1" i="0">
+                <a:solidFill>
+                  <a:srgbClr val="FFFFFF"/>
+                </a:solidFill>
+                <a:latin typeface="Arial"/>
+              </a:rPr>
+              <a:t>あしたを生きるいみがある</a:t>
+            </a:r>
+          </a:p>
+        </p:txBody>
+      </p:sp>
+      <p:sp>
+        <p:nvSpPr>
+          <p:cNvPr id="5" name="TextBox 4"/>
+          <p:cNvSpPr txBox="1"/>
+          <p:nvPr/>
+        </p:nvSpPr>
+        <p:spPr>
+          <a:xfrm>
+            <a:off x="640080" y="3753612"/>
+            <a:ext cx="10911535" cy="365760"/>
+          </a:xfrm>
+          <a:prstGeom prst="rect">
+            <a:avLst/>
+          </a:prstGeom>
+          <a:noFill/>
+        </p:spPr>
+        <p:txBody>
+          <a:bodyPr wrap="square">
+            <a:spAutoFit/>
+          </a:bodyPr>
+          <a:lstStyle/>
+          <a:p>
+            <a:pPr algn="ctr"/>
+            <a:r>
+              <a:rPr sz="2400" b="0" i="1">
+                <a:solidFill>
+                  <a:srgbClr val="AAAAAA"/>
+                </a:solidFill>
+                <a:latin typeface="Arial"/>
+              </a:rPr>
+              <a:t>ashita wo ikiru imi ga aru</a:t>
+            </a:r>
+          </a:p>
+        </p:txBody>
+      </p:sp>
+      <p:sp>
+        <p:nvSpPr>
+          <p:cNvPr id="6" name="TextBox 5"/>
+          <p:cNvSpPr txBox="1"/>
+          <p:nvPr/>
+        </p:nvSpPr>
+        <p:spPr>
+          <a:xfrm>
+            <a:off x="640080" y="4530852"/>
+            <a:ext cx="10911535" cy="310896"/>
           </a:xfrm>
           <a:prstGeom prst="rect">
             <a:avLst/>
@@ -5382,81 +5452,11 @@
             <a:r>
               <a:rPr sz="2000" b="0" i="1">
                 <a:solidFill>
-                  <a:srgbClr val="8C8C8C"/>
-                </a:solidFill>
-                <a:latin typeface="Arial"/>
-              </a:rPr>
-              <a:t/>
-            </a:r>
-          </a:p>
-        </p:txBody>
-      </p:sp>
-      <p:sp>
-        <p:nvSpPr>
-          <p:cNvPr id="5" name="TextBox 4"/>
-          <p:cNvSpPr txBox="1"/>
-          <p:nvPr/>
-        </p:nvSpPr>
-        <p:spPr>
-          <a:xfrm>
-            <a:off x="594360" y="3529584"/>
-            <a:ext cx="11002975" cy="685800"/>
-          </a:xfrm>
-          <a:prstGeom prst="rect">
-            <a:avLst/>
-          </a:prstGeom>
-          <a:noFill/>
-        </p:spPr>
-        <p:txBody>
-          <a:bodyPr wrap="square">
-            <a:spAutoFit/>
-          </a:bodyPr>
-          <a:lstStyle/>
-          <a:p>
-            <a:pPr algn="ctr"/>
-            <a:r>
-              <a:rPr sz="4400" b="1" i="0">
-                <a:solidFill>
-                  <a:srgbClr val="FFFFFF"/>
-                </a:solidFill>
-                <a:latin typeface="Arial"/>
-              </a:rPr>
-              <a:t>あしたを生きるいみがある</a:t>
-            </a:r>
-          </a:p>
-        </p:txBody>
-      </p:sp>
-      <p:sp>
-        <p:nvSpPr>
-          <p:cNvPr id="6" name="TextBox 5"/>
-          <p:cNvSpPr txBox="1"/>
-          <p:nvPr/>
-        </p:nvSpPr>
-        <p:spPr>
-          <a:xfrm>
-            <a:off x="594360" y="4251960"/>
-            <a:ext cx="11002975" cy="384048"/>
-          </a:xfrm>
-          <a:prstGeom prst="rect">
-            <a:avLst/>
-          </a:prstGeom>
-          <a:noFill/>
-        </p:spPr>
-        <p:txBody>
-          <a:bodyPr wrap="square">
-            <a:spAutoFit/>
-          </a:bodyPr>
-          <a:lstStyle/>
-          <a:p>
-            <a:pPr algn="ctr"/>
-            <a:r>
-              <a:rPr sz="2400" b="0" i="1">
-                <a:solidFill>
-                  <a:srgbClr val="B4B4B4"/>
-                </a:solidFill>
-                <a:latin typeface="Arial"/>
-              </a:rPr>
-              <a:t>ashita wo ikiru imi ga aru</a:t>
+                  <a:srgbClr val="828282"/>
+                </a:solidFill>
+                <a:latin typeface="Arial"/>
+              </a:rPr>
+              <a:t>Apenas porque Ele vive.</a:t>
             </a:r>
           </a:p>
         </p:txBody>
@@ -5469,8 +5469,8 @@
         </p:nvSpPr>
         <p:spPr>
           <a:xfrm>
-            <a:off x="594360" y="4672584"/>
-            <a:ext cx="11002975" cy="347472"/>
+            <a:off x="640080" y="4896612"/>
+            <a:ext cx="10911535" cy="310896"/>
           </a:xfrm>
           <a:prstGeom prst="rect">
             <a:avLst/>
@@ -5487,11 +5487,11 @@
             <a:r>
               <a:rPr sz="2000" b="0" i="1">
                 <a:solidFill>
-                  <a:srgbClr val="8C8C8C"/>
-                </a:solidFill>
-                <a:latin typeface="Arial"/>
-              </a:rPr>
-              <a:t/>
+                  <a:srgbClr val="828282"/>
+                </a:solidFill>
+                <a:latin typeface="Arial"/>
+              </a:rPr>
+              <a:t>Que doce é segurar um bebê recém-nascido</a:t>
             </a:r>
           </a:p>
         </p:txBody>
@@ -5530,23 +5530,23 @@
         </p:nvSpPr>
         <p:spPr>
           <a:xfrm>
-            <a:off x="594360" y="2258568"/>
-            <a:ext cx="11002975" cy="685800"/>
-          </a:xfrm>
-          <a:prstGeom prst="rect">
-            <a:avLst/>
-          </a:prstGeom>
-          <a:noFill/>
-        </p:spPr>
-        <p:txBody>
-          <a:bodyPr wrap="square">
-            <a:spAutoFit/>
-          </a:bodyPr>
-          <a:lstStyle/>
-          <a:p>
-            <a:pPr algn="ctr"/>
-            <a:r>
-              <a:rPr sz="2607" b="1" i="0">
+            <a:off x="640080" y="2052828"/>
+            <a:ext cx="10911535" cy="731520"/>
+          </a:xfrm>
+          <a:prstGeom prst="rect">
+            <a:avLst/>
+          </a:prstGeom>
+          <a:noFill/>
+        </p:spPr>
+        <p:txBody>
+          <a:bodyPr wrap="square">
+            <a:spAutoFit/>
+          </a:bodyPr>
+          <a:lstStyle/>
+          <a:p>
+            <a:pPr algn="ctr"/>
+            <a:r>
+              <a:rPr sz="2800" b="1" i="0">
                 <a:solidFill>
                   <a:srgbClr val="FFFFFF"/>
                 </a:solidFill>
@@ -5565,99 +5565,29 @@
         </p:nvSpPr>
         <p:spPr>
           <a:xfrm>
-            <a:off x="594360" y="2980944"/>
-            <a:ext cx="11002975" cy="347472"/>
-          </a:xfrm>
-          <a:prstGeom prst="rect">
-            <a:avLst/>
-          </a:prstGeom>
-          <a:noFill/>
-        </p:spPr>
-        <p:txBody>
-          <a:bodyPr wrap="square">
-            <a:spAutoFit/>
-          </a:bodyPr>
-          <a:lstStyle/>
-          <a:p>
-            <a:pPr algn="ctr"/>
-            <a:r>
-              <a:rPr sz="2200" b="0" i="1">
-                <a:solidFill>
-                  <a:srgbClr val="8C8C8C"/>
-                </a:solidFill>
-                <a:latin typeface="Arial"/>
-              </a:rPr>
-              <a:t/>
-            </a:r>
-          </a:p>
-        </p:txBody>
-      </p:sp>
-      <p:sp>
-        <p:nvSpPr>
-          <p:cNvPr id="4" name="TextBox 3"/>
-          <p:cNvSpPr txBox="1"/>
-          <p:nvPr/>
-        </p:nvSpPr>
-        <p:spPr>
-          <a:xfrm>
-            <a:off x="594360" y="3529584"/>
-            <a:ext cx="11002975" cy="685800"/>
-          </a:xfrm>
-          <a:prstGeom prst="rect">
-            <a:avLst/>
-          </a:prstGeom>
-          <a:noFill/>
-        </p:spPr>
-        <p:txBody>
-          <a:bodyPr wrap="square">
-            <a:spAutoFit/>
-          </a:bodyPr>
-          <a:lstStyle/>
-          <a:p>
-            <a:pPr algn="ctr"/>
-            <a:r>
-              <a:rPr sz="4400" b="1" i="0">
+            <a:off x="640080" y="2985516"/>
+            <a:ext cx="10911535" cy="731520"/>
+          </a:xfrm>
+          <a:prstGeom prst="rect">
+            <a:avLst/>
+          </a:prstGeom>
+          <a:noFill/>
+        </p:spPr>
+        <p:txBody>
+          <a:bodyPr wrap="square">
+            <a:spAutoFit/>
+          </a:bodyPr>
+          <a:lstStyle/>
+          <a:p>
+            <a:pPr algn="ctr"/>
+            <a:r>
+              <a:rPr sz="4800" b="1" i="0">
                 <a:solidFill>
                   <a:srgbClr val="FFFFFF"/>
                 </a:solidFill>
                 <a:latin typeface="Arial"/>
               </a:rPr>
               <a:t>Porque Ele vive,</a:t>
-            </a:r>
-          </a:p>
-        </p:txBody>
-      </p:sp>
-      <p:sp>
-        <p:nvSpPr>
-          <p:cNvPr id="5" name="TextBox 4"/>
-          <p:cNvSpPr txBox="1"/>
-          <p:nvPr/>
-        </p:nvSpPr>
-        <p:spPr>
-          <a:xfrm>
-            <a:off x="594360" y="4251960"/>
-            <a:ext cx="11002975" cy="347472"/>
-          </a:xfrm>
-          <a:prstGeom prst="rect">
-            <a:avLst/>
-          </a:prstGeom>
-          <a:noFill/>
-        </p:spPr>
-        <p:txBody>
-          <a:bodyPr wrap="square">
-            <a:spAutoFit/>
-          </a:bodyPr>
-          <a:lstStyle/>
-          <a:p>
-            <a:pPr algn="ctr"/>
-            <a:r>
-              <a:rPr sz="2200" b="0" i="1">
-                <a:solidFill>
-                  <a:srgbClr val="8C8C8C"/>
-                </a:solidFill>
-                <a:latin typeface="Arial"/>
-              </a:rPr>
-              <a:t/>
             </a:r>
           </a:p>
         </p:txBody>
@@ -5696,23 +5626,23 @@
         </p:nvSpPr>
         <p:spPr>
           <a:xfrm>
-            <a:off x="594360" y="2258568"/>
-            <a:ext cx="11002975" cy="685800"/>
-          </a:xfrm>
-          <a:prstGeom prst="rect">
-            <a:avLst/>
-          </a:prstGeom>
-          <a:noFill/>
-        </p:spPr>
-        <p:txBody>
-          <a:bodyPr wrap="square">
-            <a:spAutoFit/>
-          </a:bodyPr>
-          <a:lstStyle/>
-          <a:p>
-            <a:pPr algn="ctr"/>
-            <a:r>
-              <a:rPr sz="4400" b="1" i="0">
+            <a:off x="640080" y="2052828"/>
+            <a:ext cx="10911535" cy="731520"/>
+          </a:xfrm>
+          <a:prstGeom prst="rect">
+            <a:avLst/>
+          </a:prstGeom>
+          <a:noFill/>
+        </p:spPr>
+        <p:txBody>
+          <a:bodyPr wrap="square">
+            <a:spAutoFit/>
+          </a:bodyPr>
+          <a:lstStyle/>
+          <a:p>
+            <a:pPr algn="ctr"/>
+            <a:r>
+              <a:rPr sz="4800" b="1" i="0">
                 <a:solidFill>
                   <a:srgbClr val="FFFFFF"/>
                 </a:solidFill>
@@ -5731,99 +5661,29 @@
         </p:nvSpPr>
         <p:spPr>
           <a:xfrm>
-            <a:off x="594360" y="2980944"/>
-            <a:ext cx="11002975" cy="347472"/>
-          </a:xfrm>
-          <a:prstGeom prst="rect">
-            <a:avLst/>
-          </a:prstGeom>
-          <a:noFill/>
-        </p:spPr>
-        <p:txBody>
-          <a:bodyPr wrap="square">
-            <a:spAutoFit/>
-          </a:bodyPr>
-          <a:lstStyle/>
-          <a:p>
-            <a:pPr algn="ctr"/>
-            <a:r>
-              <a:rPr sz="2200" b="0" i="1">
-                <a:solidFill>
-                  <a:srgbClr val="8C8C8C"/>
-                </a:solidFill>
-                <a:latin typeface="Arial"/>
-              </a:rPr>
-              <a:t/>
-            </a:r>
-          </a:p>
-        </p:txBody>
-      </p:sp>
-      <p:sp>
-        <p:nvSpPr>
-          <p:cNvPr id="4" name="TextBox 3"/>
-          <p:cNvSpPr txBox="1"/>
-          <p:nvPr/>
-        </p:nvSpPr>
-        <p:spPr>
-          <a:xfrm>
-            <a:off x="594360" y="3529584"/>
-            <a:ext cx="11002975" cy="685800"/>
-          </a:xfrm>
-          <a:prstGeom prst="rect">
-            <a:avLst/>
-          </a:prstGeom>
-          <a:noFill/>
-        </p:spPr>
-        <p:txBody>
-          <a:bodyPr wrap="square">
-            <a:spAutoFit/>
-          </a:bodyPr>
-          <a:lstStyle/>
-          <a:p>
-            <a:pPr algn="ctr"/>
-            <a:r>
-              <a:rPr sz="4400" b="1" i="0">
+            <a:off x="640080" y="2985516"/>
+            <a:ext cx="10911535" cy="731520"/>
+          </a:xfrm>
+          <a:prstGeom prst="rect">
+            <a:avLst/>
+          </a:prstGeom>
+          <a:noFill/>
+        </p:spPr>
+        <p:txBody>
+          <a:bodyPr wrap="square">
+            <a:spAutoFit/>
+          </a:bodyPr>
+          <a:lstStyle/>
+          <a:p>
+            <a:pPr algn="ctr"/>
+            <a:r>
+              <a:rPr sz="4800" b="1" i="0">
                 <a:solidFill>
                   <a:srgbClr val="FFFFFF"/>
                 </a:solidFill>
                 <a:latin typeface="Arial"/>
               </a:rPr>
               <a:t>Porque Ele vive,</a:t>
-            </a:r>
-          </a:p>
-        </p:txBody>
-      </p:sp>
-      <p:sp>
-        <p:nvSpPr>
-          <p:cNvPr id="5" name="TextBox 4"/>
-          <p:cNvSpPr txBox="1"/>
-          <p:nvPr/>
-        </p:nvSpPr>
-        <p:spPr>
-          <a:xfrm>
-            <a:off x="594360" y="4251960"/>
-            <a:ext cx="11002975" cy="347472"/>
-          </a:xfrm>
-          <a:prstGeom prst="rect">
-            <a:avLst/>
-          </a:prstGeom>
-          <a:noFill/>
-        </p:spPr>
-        <p:txBody>
-          <a:bodyPr wrap="square">
-            <a:spAutoFit/>
-          </a:bodyPr>
-          <a:lstStyle/>
-          <a:p>
-            <a:pPr algn="ctr"/>
-            <a:r>
-              <a:rPr sz="2200" b="0" i="1">
-                <a:solidFill>
-                  <a:srgbClr val="8C8C8C"/>
-                </a:solidFill>
-                <a:latin typeface="Arial"/>
-              </a:rPr>
-              <a:t/>
             </a:r>
           </a:p>
         </p:txBody>
@@ -5862,23 +5722,23 @@
         </p:nvSpPr>
         <p:spPr>
           <a:xfrm>
-            <a:off x="594360" y="1837944"/>
-            <a:ext cx="11002975" cy="685800"/>
-          </a:xfrm>
-          <a:prstGeom prst="rect">
-            <a:avLst/>
-          </a:prstGeom>
-          <a:noFill/>
-        </p:spPr>
-        <p:txBody>
-          <a:bodyPr wrap="square">
-            <a:spAutoFit/>
-          </a:bodyPr>
-          <a:lstStyle/>
-          <a:p>
-            <a:pPr algn="ctr"/>
-            <a:r>
-              <a:rPr sz="4400" b="1" i="0">
+            <a:off x="640080" y="1650492"/>
+            <a:ext cx="10911535" cy="731520"/>
+          </a:xfrm>
+          <a:prstGeom prst="rect">
+            <a:avLst/>
+          </a:prstGeom>
+          <a:noFill/>
+        </p:spPr>
+        <p:txBody>
+          <a:bodyPr wrap="square">
+            <a:spAutoFit/>
+          </a:bodyPr>
+          <a:lstStyle/>
+          <a:p>
+            <a:pPr algn="ctr"/>
+            <a:r>
+              <a:rPr sz="4800" b="1" i="0">
                 <a:solidFill>
                   <a:srgbClr val="FFFFFF"/>
                 </a:solidFill>
@@ -5897,8 +5757,8 @@
         </p:nvSpPr>
         <p:spPr>
           <a:xfrm>
-            <a:off x="594360" y="2560320"/>
-            <a:ext cx="11002975" cy="384048"/>
+            <a:off x="640080" y="2418588"/>
+            <a:ext cx="10911535" cy="365760"/>
           </a:xfrm>
           <a:prstGeom prst="rect">
             <a:avLst/>
@@ -5915,7 +5775,7 @@
             <a:r>
               <a:rPr sz="2400" b="0" i="1">
                 <a:solidFill>
-                  <a:srgbClr val="B4B4B4"/>
+                  <a:srgbClr val="AAAAAA"/>
                 </a:solidFill>
                 <a:latin typeface="Arial"/>
               </a:rPr>
@@ -5932,8 +5792,78 @@
         </p:nvSpPr>
         <p:spPr>
           <a:xfrm>
-            <a:off x="594360" y="2980944"/>
-            <a:ext cx="11002975" cy="347472"/>
+            <a:off x="640080" y="2985516"/>
+            <a:ext cx="10911535" cy="731520"/>
+          </a:xfrm>
+          <a:prstGeom prst="rect">
+            <a:avLst/>
+          </a:prstGeom>
+          <a:noFill/>
+        </p:spPr>
+        <p:txBody>
+          <a:bodyPr wrap="square">
+            <a:spAutoFit/>
+          </a:bodyPr>
+          <a:lstStyle/>
+          <a:p>
+            <a:pPr algn="ctr"/>
+            <a:r>
+              <a:rPr sz="4800" b="1" i="0">
+                <a:solidFill>
+                  <a:srgbClr val="FFFFFF"/>
+                </a:solidFill>
+                <a:latin typeface="Arial"/>
+              </a:rPr>
+              <a:t>みくにに は いるひ</a:t>
+            </a:r>
+          </a:p>
+        </p:txBody>
+      </p:sp>
+      <p:sp>
+        <p:nvSpPr>
+          <p:cNvPr id="5" name="TextBox 4"/>
+          <p:cNvSpPr txBox="1"/>
+          <p:nvPr/>
+        </p:nvSpPr>
+        <p:spPr>
+          <a:xfrm>
+            <a:off x="640080" y="3753612"/>
+            <a:ext cx="10911535" cy="365760"/>
+          </a:xfrm>
+          <a:prstGeom prst="rect">
+            <a:avLst/>
+          </a:prstGeom>
+          <a:noFill/>
+        </p:spPr>
+        <p:txBody>
+          <a:bodyPr wrap="square">
+            <a:spAutoFit/>
+          </a:bodyPr>
+          <a:lstStyle/>
+          <a:p>
+            <a:pPr algn="ctr"/>
+            <a:r>
+              <a:rPr sz="2400" b="0" i="1">
+                <a:solidFill>
+                  <a:srgbClr val="AAAAAA"/>
+                </a:solidFill>
+                <a:latin typeface="Arial"/>
+              </a:rPr>
+              <a:t>mikuni ni wa iru hi</a:t>
+            </a:r>
+          </a:p>
+        </p:txBody>
+      </p:sp>
+      <p:sp>
+        <p:nvSpPr>
+          <p:cNvPr id="6" name="TextBox 5"/>
+          <p:cNvSpPr txBox="1"/>
+          <p:nvPr/>
+        </p:nvSpPr>
+        <p:spPr>
+          <a:xfrm>
+            <a:off x="640080" y="4530852"/>
+            <a:ext cx="10911535" cy="310896"/>
           </a:xfrm>
           <a:prstGeom prst="rect">
             <a:avLst/>
@@ -5950,81 +5880,11 @@
             <a:r>
               <a:rPr sz="2000" b="0" i="1">
                 <a:solidFill>
-                  <a:srgbClr val="8C8C8C"/>
-                </a:solidFill>
-                <a:latin typeface="Arial"/>
-              </a:rPr>
-              <a:t/>
-            </a:r>
-          </a:p>
-        </p:txBody>
-      </p:sp>
-      <p:sp>
-        <p:nvSpPr>
-          <p:cNvPr id="5" name="TextBox 4"/>
-          <p:cNvSpPr txBox="1"/>
-          <p:nvPr/>
-        </p:nvSpPr>
-        <p:spPr>
-          <a:xfrm>
-            <a:off x="594360" y="3529584"/>
-            <a:ext cx="11002975" cy="685800"/>
-          </a:xfrm>
-          <a:prstGeom prst="rect">
-            <a:avLst/>
-          </a:prstGeom>
-          <a:noFill/>
-        </p:spPr>
-        <p:txBody>
-          <a:bodyPr wrap="square">
-            <a:spAutoFit/>
-          </a:bodyPr>
-          <a:lstStyle/>
-          <a:p>
-            <a:pPr algn="ctr"/>
-            <a:r>
-              <a:rPr sz="4400" b="1" i="0">
-                <a:solidFill>
-                  <a:srgbClr val="FFFFFF"/>
-                </a:solidFill>
-                <a:latin typeface="Arial"/>
-              </a:rPr>
-              <a:t>みくにに は いるひ</a:t>
-            </a:r>
-          </a:p>
-        </p:txBody>
-      </p:sp>
-      <p:sp>
-        <p:nvSpPr>
-          <p:cNvPr id="6" name="TextBox 5"/>
-          <p:cNvSpPr txBox="1"/>
-          <p:nvPr/>
-        </p:nvSpPr>
-        <p:spPr>
-          <a:xfrm>
-            <a:off x="594360" y="4251960"/>
-            <a:ext cx="11002975" cy="384048"/>
-          </a:xfrm>
-          <a:prstGeom prst="rect">
-            <a:avLst/>
-          </a:prstGeom>
-          <a:noFill/>
-        </p:spPr>
-        <p:txBody>
-          <a:bodyPr wrap="square">
-            <a:spAutoFit/>
-          </a:bodyPr>
-          <a:lstStyle/>
-          <a:p>
-            <a:pPr algn="ctr"/>
-            <a:r>
-              <a:rPr sz="2400" b="0" i="1">
-                <a:solidFill>
-                  <a:srgbClr val="B4B4B4"/>
-                </a:solidFill>
-                <a:latin typeface="Arial"/>
-              </a:rPr>
-              <a:t>mikuni ni wa iru hi</a:t>
+                  <a:srgbClr val="828282"/>
+                </a:solidFill>
+                <a:latin typeface="Arial"/>
+              </a:rPr>
+              <a:t>Porque ele vive</a:t>
             </a:r>
           </a:p>
         </p:txBody>
@@ -6037,8 +5897,8 @@
         </p:nvSpPr>
         <p:spPr>
           <a:xfrm>
-            <a:off x="594360" y="4672584"/>
-            <a:ext cx="11002975" cy="347472"/>
+            <a:off x="640080" y="4896612"/>
+            <a:ext cx="10911535" cy="310896"/>
           </a:xfrm>
           <a:prstGeom prst="rect">
             <a:avLst/>
@@ -6055,11 +5915,11 @@
             <a:r>
               <a:rPr sz="2000" b="0" i="1">
                 <a:solidFill>
-                  <a:srgbClr val="8C8C8C"/>
-                </a:solidFill>
-                <a:latin typeface="Arial"/>
-              </a:rPr>
-              <a:t/>
+                  <a:srgbClr val="828282"/>
+                </a:solidFill>
+                <a:latin typeface="Arial"/>
+              </a:rPr>
+              <a:t>Deus enviou Seu Filho. Eles o chamaram Jesus.</a:t>
             </a:r>
           </a:p>
         </p:txBody>

--- a/output_pptx/Because_He_Lives.pptx
+++ b/output_pptx/Because_He_Lives.pptx
@@ -5592,6 +5592,76 @@
           </a:p>
         </p:txBody>
       </p:sp>
+      <p:sp>
+        <p:nvSpPr>
+          <p:cNvPr id="4" name="TextBox 3"/>
+          <p:cNvSpPr txBox="1"/>
+          <p:nvPr/>
+        </p:nvSpPr>
+        <p:spPr>
+          <a:xfrm>
+            <a:off x="640080" y="4128516"/>
+            <a:ext cx="10911535" cy="310896"/>
+          </a:xfrm>
+          <a:prstGeom prst="rect">
+            <a:avLst/>
+          </a:prstGeom>
+          <a:noFill/>
+        </p:spPr>
+        <p:txBody>
+          <a:bodyPr wrap="square">
+            <a:spAutoFit/>
+          </a:bodyPr>
+          <a:lstStyle/>
+          <a:p>
+            <a:pPr algn="ctr"/>
+            <a:r>
+              <a:rPr sz="2000" b="0" i="0">
+                <a:solidFill>
+                  <a:srgbClr val="828282"/>
+                </a:solidFill>
+                <a:latin typeface="Arial"/>
+              </a:rPr>
+              <a:t>空の墓があります、私の救い主が生きていることを証明するために。</a:t>
+            </a:r>
+          </a:p>
+        </p:txBody>
+      </p:sp>
+      <p:sp>
+        <p:nvSpPr>
+          <p:cNvPr id="5" name="TextBox 4"/>
+          <p:cNvSpPr txBox="1"/>
+          <p:nvPr/>
+        </p:nvSpPr>
+        <p:spPr>
+          <a:xfrm>
+            <a:off x="640080" y="4494276"/>
+            <a:ext cx="10911535" cy="310896"/>
+          </a:xfrm>
+          <a:prstGeom prst="rect">
+            <a:avLst/>
+          </a:prstGeom>
+          <a:noFill/>
+        </p:spPr>
+        <p:txBody>
+          <a:bodyPr wrap="square">
+            <a:spAutoFit/>
+          </a:bodyPr>
+          <a:lstStyle/>
+          <a:p>
+            <a:pPr algn="ctr"/>
+            <a:r>
+              <a:rPr sz="2000" b="0" i="0">
+                <a:solidFill>
+                  <a:srgbClr val="828282"/>
+                </a:solidFill>
+                <a:latin typeface="Arial"/>
+              </a:rPr>
+              <a:t>彼が生きているので、</a:t>
+            </a:r>
+          </a:p>
+        </p:txBody>
+      </p:sp>
     </p:spTree>
   </p:cSld>
   <p:clrMapOvr>
@@ -5684,6 +5754,76 @@
                 <a:latin typeface="Arial"/>
               </a:rPr>
               <a:t>Porque Ele vive,</a:t>
+            </a:r>
+          </a:p>
+        </p:txBody>
+      </p:sp>
+      <p:sp>
+        <p:nvSpPr>
+          <p:cNvPr id="4" name="TextBox 3"/>
+          <p:cNvSpPr txBox="1"/>
+          <p:nvPr/>
+        </p:nvSpPr>
+        <p:spPr>
+          <a:xfrm>
+            <a:off x="640080" y="4128516"/>
+            <a:ext cx="10911535" cy="310896"/>
+          </a:xfrm>
+          <a:prstGeom prst="rect">
+            <a:avLst/>
+          </a:prstGeom>
+          <a:noFill/>
+        </p:spPr>
+        <p:txBody>
+          <a:bodyPr wrap="square">
+            <a:spAutoFit/>
+          </a:bodyPr>
+          <a:lstStyle/>
+          <a:p>
+            <a:pPr algn="ctr"/>
+            <a:r>
+              <a:rPr sz="2000" b="0" i="0">
+                <a:solidFill>
+                  <a:srgbClr val="828282"/>
+                </a:solidFill>
+                <a:latin typeface="Arial"/>
+              </a:rPr>
+              <a:t>私は明日に立ち向かうことができます。</a:t>
+            </a:r>
+          </a:p>
+        </p:txBody>
+      </p:sp>
+      <p:sp>
+        <p:nvSpPr>
+          <p:cNvPr id="5" name="TextBox 4"/>
+          <p:cNvSpPr txBox="1"/>
+          <p:nvPr/>
+        </p:nvSpPr>
+        <p:spPr>
+          <a:xfrm>
+            <a:off x="640080" y="4494276"/>
+            <a:ext cx="10911535" cy="310896"/>
+          </a:xfrm>
+          <a:prstGeom prst="rect">
+            <a:avLst/>
+          </a:prstGeom>
+          <a:noFill/>
+        </p:spPr>
+        <p:txBody>
+          <a:bodyPr wrap="square">
+            <a:spAutoFit/>
+          </a:bodyPr>
+          <a:lstStyle/>
+          <a:p>
+            <a:pPr algn="ctr"/>
+            <a:r>
+              <a:rPr sz="2000" b="0" i="0">
+                <a:solidFill>
+                  <a:srgbClr val="828282"/>
+                </a:solidFill>
+                <a:latin typeface="Arial"/>
+              </a:rPr>
+              <a:t>彼が生きているので、</a:t>
             </a:r>
           </a:p>
         </p:txBody>
